--- a/finaldemoppt/PRAMAAN-AICTE_SIH2026_Idea_Presentation.pptx
+++ b/finaldemoppt/PRAMAAN-AICTE_SIH2026_Idea_Presentation.pptx
@@ -5801,8 +5801,8 @@
         </p:nvSpPr>
         <p:spPr>
           <a:xfrm>
-            <a:off x="548640" y="1691640"/>
-            <a:ext cx="7772400" cy="4389120"/>
+            <a:off x="457200" y="1645920"/>
+            <a:ext cx="5760720" cy="4434840"/>
           </a:xfrm>
           <a:prstGeom prst="rect">
             <a:avLst/>
@@ -5815,199 +5815,205 @@
           </a:bodyPr>
           <a:lstStyle/>
           <a:p>
-            <a:r>
-              <a:rPr sz="1350" b="1">
-                <a:solidFill>
-                  <a:srgbClr val="112266"/>
-                </a:solidFill>
-                <a:latin typeface="Arial"/>
-              </a:rPr>
-              <a:t>Problem Statement ID: </a:t>
-            </a:r>
-            <a:r>
-              <a:rPr sz="1300" b="1">
-                <a:solidFill>
-                  <a:srgbClr val="222222"/>
-                </a:solidFill>
-                <a:latin typeface="Arial"/>
-              </a:rPr>
-              <a:t>SIH26263</a:t>
-            </a:r>
-            <a:endParaRPr lang="en-US" dirty="0"/>
-          </a:p>
-          <a:p>
             <a:pPr>
               <a:spcBef>
-                <a:spcPts val="700"/>
+                <a:spcPts val="0"/>
               </a:spcBef>
             </a:pPr>
             <a:r>
+              <a:rPr sz="1250" b="1">
+                <a:solidFill>
+                  <a:srgbClr val="112266"/>
+                </a:solidFill>
+                <a:latin typeface="Arial"/>
+              </a:rPr>
+              <a:t>Problem Statement ID: </a:t>
+            </a:r>
+            <a:r>
               <a:rPr sz="1350" b="1">
                 <a:solidFill>
                   <a:srgbClr val="112266"/>
                 </a:solidFill>
                 <a:latin typeface="Arial"/>
               </a:rPr>
-              <a:t>Problem Statement Title: </a:t>
-            </a:r>
-            <a:r>
-              <a:rPr sz="1300" b="0">
-                <a:solidFill>
-                  <a:srgbClr val="222222"/>
-                </a:solidFill>
-                <a:latin typeface="Arial"/>
-              </a:rPr>
-              <a:t>Development of an APAAR ID-Based Student Data Management and Verification Platform for AICTE-Approved Institutions</a:t>
-            </a:r>
+              <a:t>SIH26263</a:t>
+            </a:r>
+            <a:endParaRPr lang="en-US" dirty="0"/>
           </a:p>
           <a:p>
             <a:pPr>
               <a:spcBef>
-                <a:spcPts val="700"/>
+                <a:spcPts val="500"/>
               </a:spcBef>
             </a:pPr>
             <a:r>
-              <a:rPr sz="1350" b="1">
+              <a:rPr sz="1250" b="1">
                 <a:solidFill>
                   <a:srgbClr val="112266"/>
                 </a:solidFill>
                 <a:latin typeface="Arial"/>
               </a:rPr>
-              <a:t>Theme: </a:t>
-            </a:r>
-            <a:r>
-              <a:rPr sz="1300" b="0">
-                <a:solidFill>
-                  <a:srgbClr val="222222"/>
-                </a:solidFill>
-                <a:latin typeface="Arial"/>
-              </a:rPr>
-              <a:t>Smart Automation</a:t>
+              <a:t>Problem Statement Title: </a:t>
+            </a:r>
+            <a:r>
+              <a:rPr sz="1100" b="0">
+                <a:solidFill>
+                  <a:srgbClr val="1A365D"/>
+                </a:solidFill>
+                <a:latin typeface="Arial"/>
+              </a:rPr>
+              <a:t>Development of an APAAR ID-Based Student Data Management and Verification Platform for AICTE-Approved Institutions</a:t>
             </a:r>
           </a:p>
           <a:p>
             <a:pPr>
               <a:spcBef>
-                <a:spcPts val="700"/>
+                <a:spcPts val="500"/>
               </a:spcBef>
             </a:pPr>
             <a:r>
-              <a:rPr sz="1350" b="1">
+              <a:rPr sz="1250" b="1">
                 <a:solidFill>
                   <a:srgbClr val="112266"/>
                 </a:solidFill>
                 <a:latin typeface="Arial"/>
               </a:rPr>
-              <a:t>PS Category: </a:t>
-            </a:r>
-            <a:r>
-              <a:rPr sz="1300" b="0">
+              <a:t>Theme: </a:t>
+            </a:r>
+            <a:r>
+              <a:rPr sz="1200" b="0">
                 <a:solidFill>
                   <a:srgbClr val="222222"/>
                 </a:solidFill>
                 <a:latin typeface="Arial"/>
               </a:rPr>
-              <a:t>Software</a:t>
+              <a:t>Smart Automation</a:t>
             </a:r>
           </a:p>
           <a:p>
             <a:pPr>
               <a:spcBef>
-                <a:spcPts val="700"/>
+                <a:spcPts val="500"/>
               </a:spcBef>
             </a:pPr>
             <a:r>
-              <a:rPr sz="1350" b="1">
+              <a:rPr sz="1250" b="1">
                 <a:solidFill>
                   <a:srgbClr val="112266"/>
                 </a:solidFill>
                 <a:latin typeface="Arial"/>
               </a:rPr>
-              <a:t>Team ID: </a:t>
-            </a:r>
-            <a:r>
-              <a:rPr sz="1300" b="0">
+              <a:t>PS Category: </a:t>
+            </a:r>
+            <a:r>
+              <a:rPr sz="1200" b="0">
                 <a:solidFill>
                   <a:srgbClr val="222222"/>
                 </a:solidFill>
                 <a:latin typeface="Arial"/>
               </a:rPr>
-              <a:t>[YOUR TEAM ID]</a:t>
+              <a:t>Software</a:t>
             </a:r>
           </a:p>
           <a:p>
             <a:pPr>
               <a:spcBef>
-                <a:spcPts val="700"/>
+                <a:spcPts val="500"/>
               </a:spcBef>
             </a:pPr>
             <a:r>
-              <a:rPr sz="1350" b="1">
+              <a:rPr sz="1250" b="1">
                 <a:solidFill>
                   <a:srgbClr val="112266"/>
                 </a:solidFill>
                 <a:latin typeface="Arial"/>
               </a:rPr>
-              <a:t>Team Name: </a:t>
-            </a:r>
-            <a:r>
-              <a:rPr sz="1300" b="1">
+              <a:t>Team ID: </a:t>
+            </a:r>
+            <a:r>
+              <a:rPr sz="1200" b="0">
                 <a:solidFill>
                   <a:srgbClr val="222222"/>
                 </a:solidFill>
                 <a:latin typeface="Arial"/>
               </a:rPr>
-              <a:t>TCE_Yquanto (Thiagarajar College of Engineering)</a:t>
+              <a:t>TCE_Yquanto</a:t>
             </a:r>
           </a:p>
           <a:p>
             <a:pPr>
               <a:spcBef>
-                <a:spcPts val="700"/>
+                <a:spcPts val="500"/>
               </a:spcBef>
             </a:pPr>
             <a:r>
-              <a:rPr sz="1350" b="1">
+              <a:rPr sz="1250" b="1">
                 <a:solidFill>
                   <a:srgbClr val="112266"/>
                 </a:solidFill>
                 <a:latin typeface="Arial"/>
               </a:rPr>
-              <a:t>Live Repository: </a:t>
-            </a:r>
-            <a:r>
-              <a:rPr sz="1300" b="1">
-                <a:solidFill>
-                  <a:srgbClr val="008C6E"/>
-                </a:solidFill>
-                <a:latin typeface="Arial"/>
-              </a:rPr>
-              <a:t>https://github.com/naveeshpcbin/APAAR-ID-BASED-SYSTEM</a:t>
+              <a:t>Team Name: </a:t>
+            </a:r>
+            <a:r>
+              <a:rPr sz="1250" b="1">
+                <a:solidFill>
+                  <a:srgbClr val="112266"/>
+                </a:solidFill>
+                <a:latin typeface="Arial"/>
+              </a:rPr>
+              <a:t>TCE_Yquanto  (Thiagarajar College of Engineering, Madurai)</a:t>
             </a:r>
           </a:p>
           <a:p>
             <a:pPr>
               <a:spcBef>
-                <a:spcPts val="700"/>
+                <a:spcPts val="500"/>
               </a:spcBef>
             </a:pPr>
             <a:r>
-              <a:rPr sz="1350" b="1">
+              <a:rPr sz="1250" b="1">
                 <a:solidFill>
                   <a:srgbClr val="112266"/>
                 </a:solidFill>
                 <a:latin typeface="Arial"/>
               </a:rPr>
-              <a:t>Prototype Domain: </a:t>
-            </a:r>
-            <a:r>
-              <a:rPr sz="1300" b="0">
+              <a:t>Live Repository: </a:t>
+            </a:r>
+            <a:r>
+              <a:rPr sz="1150" b="1">
                 <a:solidFill>
                   <a:srgbClr val="008C6E"/>
                 </a:solidFill>
                 <a:latin typeface="Arial"/>
               </a:rPr>
-              <a:t>https://pramaan-aicte.yourdomain.com  [PASTE CUSTOM DOMAIN HERE]</a:t>
+              <a:t>https://github.com/naveeshpcbin/APAAR-ID-BASED-SYSTEM</a:t>
+            </a:r>
+          </a:p>
+          <a:p>
+            <a:pPr>
+              <a:spcBef>
+                <a:spcPts val="500"/>
+              </a:spcBef>
+            </a:pPr>
+            <a:r>
+              <a:rPr sz="1250" b="1">
+                <a:solidFill>
+                  <a:srgbClr val="112266"/>
+                </a:solidFill>
+                <a:latin typeface="Arial"/>
+              </a:rPr>
+              <a:t>Hosted Demo Domain: </a:t>
+            </a:r>
+            <a:r>
+              <a:rPr sz="1150" b="1">
+                <a:solidFill>
+                  <a:srgbClr val="1A56DB"/>
+                </a:solidFill>
+                <a:latin typeface="Arial"/>
+              </a:rPr>
+              <a:t>https://pramaan-aicte.yourdomain.com
+[PASTE YOUR CUSTOM DOMAIN HERE]</a:t>
             </a:r>
           </a:p>
         </p:txBody>
@@ -6137,8 +6143,8 @@
         </p:nvSpPr>
         <p:spPr>
           <a:xfrm>
-            <a:off x="1645920" y="164592"/>
-            <a:ext cx="8046720" cy="777240"/>
+            <a:off x="1691640" y="164592"/>
+            <a:ext cx="8092440" cy="777240"/>
           </a:xfrm>
         </p:spPr>
         <p:txBody>
@@ -6146,7 +6152,7 @@
           <a:lstStyle/>
           <a:p>
             <a:pPr eaLnBrk="1" hangingPunct="1" algn="l">
-              <a:defRPr sz="1700" b="1">
+              <a:defRPr sz="1650" b="1">
                 <a:solidFill>
                   <a:srgbClr val="112266"/>
                 </a:solidFill>
@@ -6154,7 +6160,7 @@
               </a:defRPr>
             </a:pPr>
             <a:r>
-              <a:t>PRAMAAN-AICTE: APAAR-BASED REGULATORY RECONCILIATION &amp; MONITORING</a:t>
+              <a:t>PROPOSED SOLUTION: THE PRAMAAN-AICTE REGULATORY ENGINE</a:t>
             </a:r>
           </a:p>
         </p:txBody>
@@ -6319,14 +6325,112 @@
       </p:pic>
       <p:sp>
         <p:nvSpPr>
-          <p:cNvPr id="15362" name="TextBox 15361"/>
-          <p:cNvSpPr txBox="1"/>
+          <p:cNvPr id="15362" name="Rounded Rectangle 15361"/>
+          <p:cNvSpPr/>
           <p:nvPr/>
         </p:nvSpPr>
         <p:spPr>
           <a:xfrm>
             <a:off x="365760" y="1115568"/>
-            <a:ext cx="6217920" cy="5029200"/>
+            <a:ext cx="5623560" cy="1417320"/>
+          </a:xfrm>
+          <a:prstGeom prst="roundRect">
+            <a:avLst/>
+          </a:prstGeom>
+          <a:solidFill>
+            <a:srgbClr val="FFFFFF"/>
+          </a:solidFill>
+          <a:ln w="19050">
+            <a:solidFill>
+              <a:srgbClr val="CBD5E1"/>
+            </a:solidFill>
+          </a:ln>
+        </p:spPr>
+        <p:style>
+          <a:lnRef idx="1">
+            <a:schemeClr val="accent1"/>
+          </a:lnRef>
+          <a:fillRef idx="3">
+            <a:schemeClr val="accent1"/>
+          </a:fillRef>
+          <a:effectRef idx="2">
+            <a:schemeClr val="accent1"/>
+          </a:effectRef>
+          <a:fontRef idx="minor">
+            <a:schemeClr val="lt1"/>
+          </a:fontRef>
+        </p:style>
+        <p:txBody>
+          <a:bodyPr rtlCol="0" anchor="ctr"/>
+          <a:lstStyle/>
+          <a:p>
+            <a:pPr algn="ctr"/>
+          </a:p>
+        </p:txBody>
+      </p:sp>
+      <p:sp>
+        <p:nvSpPr>
+          <p:cNvPr id="15363" name="Rounded Rectangle 15362"/>
+          <p:cNvSpPr/>
+          <p:nvPr/>
+        </p:nvSpPr>
+        <p:spPr>
+          <a:xfrm>
+            <a:off x="475488" y="1005840"/>
+            <a:ext cx="5404104" cy="292608"/>
+          </a:xfrm>
+          <a:prstGeom prst="roundRect">
+            <a:avLst/>
+          </a:prstGeom>
+          <a:solidFill>
+            <a:srgbClr val="008C6E"/>
+          </a:solidFill>
+          <a:ln>
+            <a:noFill/>
+          </a:ln>
+        </p:spPr>
+        <p:style>
+          <a:lnRef idx="1">
+            <a:schemeClr val="accent1"/>
+          </a:lnRef>
+          <a:fillRef idx="3">
+            <a:schemeClr val="accent1"/>
+          </a:fillRef>
+          <a:effectRef idx="2">
+            <a:schemeClr val="accent1"/>
+          </a:effectRef>
+          <a:fontRef idx="minor">
+            <a:schemeClr val="lt1"/>
+          </a:fontRef>
+        </p:style>
+        <p:txBody>
+          <a:bodyPr rtlCol="0" anchor="ctr" wrap="none" lIns="73152" rIns="73152"/>
+          <a:lstStyle/>
+          <a:p>
+            <a:pPr algn="ctr">
+              <a:defRPr sz="1000" b="1">
+                <a:solidFill>
+                  <a:srgbClr val="FFFFFF"/>
+                </a:solidFill>
+                <a:latin typeface="Arial"/>
+              </a:defRPr>
+            </a:pPr>
+            <a:r>
+              <a:t>1. SMART INGESTION &amp; INTERACTIVE SANDBOX</a:t>
+            </a:r>
+          </a:p>
+        </p:txBody>
+      </p:sp>
+      <p:sp>
+        <p:nvSpPr>
+          <p:cNvPr id="15364" name="TextBox 15363"/>
+          <p:cNvSpPr txBox="1"/>
+          <p:nvPr/>
+        </p:nvSpPr>
+        <p:spPr>
+          <a:xfrm>
+            <a:off x="457200" y="1316736"/>
+            <a:ext cx="5440680" cy="1179576"/>
           </a:xfrm>
           <a:prstGeom prst="rect">
             <a:avLst/>
@@ -6334,285 +6438,555 @@
           <a:noFill/>
         </p:spPr>
         <p:txBody>
-          <a:bodyPr wrap="square" lIns="45720" rIns="45720">
+          <a:bodyPr wrap="square" lIns="18288" rIns="18288" tIns="18288" bIns="18288">
             <a:spAutoFit/>
           </a:bodyPr>
           <a:lstStyle/>
           <a:p>
             <a:pPr>
-              <a:defRPr sz="1100" b="1">
+              <a:spcBef>
+                <a:spcPts val="0"/>
+              </a:spcBef>
+            </a:pPr>
+            <a:r>
+              <a:rPr sz="850" b="1">
                 <a:solidFill>
                   <a:srgbClr val="008C6E"/>
                 </a:solidFill>
                 <a:latin typeface="Arial"/>
-              </a:defRPr>
-            </a:pPr>
-            <a:r>
-              <a:t>Proposed Solution &amp; Architectural Overview</a:t>
+              </a:rPr>
+              <a:t>• Fuzzy Alias Normalizer: </a:t>
+            </a:r>
+            <a:r>
+              <a:rPr sz="850">
+                <a:solidFill>
+                  <a:srgbClr val="222222"/>
+                </a:solidFill>
+                <a:latin typeface="Arial"/>
+              </a:rPr>
+              <a:t>Sub-50ms regex mapping automatically resolves 50+ divergent college ERP column headers (e.g. apaar_no, uid -&gt; apaar_id).</a:t>
             </a:r>
           </a:p>
           <a:p>
             <a:pPr>
               <a:spcBef>
-                <a:spcPts val="350"/>
+                <a:spcPts val="300"/>
               </a:spcBef>
             </a:pPr>
             <a:r>
-              <a:rPr sz="950" b="1">
+              <a:rPr sz="850" b="1">
+                <a:solidFill>
+                  <a:srgbClr val="008C6E"/>
+                </a:solidFill>
+                <a:latin typeface="Arial"/>
+              </a:rPr>
+              <a:t>• In-Browser Quarantine: </a:t>
+            </a:r>
+            <a:r>
+              <a:rPr sz="850">
                 <a:solidFill>
                   <a:srgbClr val="222222"/>
                 </a:solidFill>
                 <a:latin typeface="Arial"/>
               </a:rPr>
-              <a:t>•  Dual-Portal Ecosystem: </a:t>
-            </a:r>
-            <a:r>
-              <a:rPr sz="950" b="0">
-                <a:solidFill>
-                  <a:srgbClr val="222222"/>
-                </a:solidFill>
-                <a:latin typeface="Arial"/>
-              </a:rPr>
-              <a:t>Decouples institutional ingestion workspaces from the AICTE Central Executive Command Center for tenant privacy.</a:t>
-            </a:r>
-          </a:p>
+              <a:t>Editable spreadsheet sandbox isolates syntax errors and warns on quota breaches before permanent council commit.</a:t>
+            </a:r>
+          </a:p>
+        </p:txBody>
+      </p:sp>
+      <p:sp>
+        <p:nvSpPr>
+          <p:cNvPr id="15365" name="Rounded Rectangle 15364"/>
+          <p:cNvSpPr/>
+          <p:nvPr/>
+        </p:nvSpPr>
+        <p:spPr>
+          <a:xfrm>
+            <a:off x="365760" y="2651760"/>
+            <a:ext cx="5623560" cy="1444752"/>
+          </a:xfrm>
+          <a:prstGeom prst="roundRect">
+            <a:avLst/>
+          </a:prstGeom>
+          <a:solidFill>
+            <a:srgbClr val="FFFFFF"/>
+          </a:solidFill>
+          <a:ln w="19050">
+            <a:solidFill>
+              <a:srgbClr val="CBD5E1"/>
+            </a:solidFill>
+          </a:ln>
+        </p:spPr>
+        <p:style>
+          <a:lnRef idx="1">
+            <a:schemeClr val="accent1"/>
+          </a:lnRef>
+          <a:fillRef idx="3">
+            <a:schemeClr val="accent1"/>
+          </a:fillRef>
+          <a:effectRef idx="2">
+            <a:schemeClr val="accent1"/>
+          </a:effectRef>
+          <a:fontRef idx="minor">
+            <a:schemeClr val="lt1"/>
+          </a:fontRef>
+        </p:style>
+        <p:txBody>
+          <a:bodyPr rtlCol="0" anchor="ctr"/>
+          <a:lstStyle/>
+          <a:p>
+            <a:pPr algn="ctr"/>
+          </a:p>
+        </p:txBody>
+      </p:sp>
+      <p:sp>
+        <p:nvSpPr>
+          <p:cNvPr id="15366" name="Rounded Rectangle 15365"/>
+          <p:cNvSpPr/>
+          <p:nvPr/>
+        </p:nvSpPr>
+        <p:spPr>
+          <a:xfrm>
+            <a:off x="475488" y="2542032"/>
+            <a:ext cx="5404104" cy="292608"/>
+          </a:xfrm>
+          <a:prstGeom prst="roundRect">
+            <a:avLst/>
+          </a:prstGeom>
+          <a:solidFill>
+            <a:srgbClr val="112266"/>
+          </a:solidFill>
+          <a:ln>
+            <a:noFill/>
+          </a:ln>
+        </p:spPr>
+        <p:style>
+          <a:lnRef idx="1">
+            <a:schemeClr val="accent1"/>
+          </a:lnRef>
+          <a:fillRef idx="3">
+            <a:schemeClr val="accent1"/>
+          </a:fillRef>
+          <a:effectRef idx="2">
+            <a:schemeClr val="accent1"/>
+          </a:effectRef>
+          <a:fontRef idx="minor">
+            <a:schemeClr val="lt1"/>
+          </a:fontRef>
+        </p:style>
+        <p:txBody>
+          <a:bodyPr rtlCol="0" anchor="ctr" wrap="none" lIns="73152" rIns="73152"/>
+          <a:lstStyle/>
+          <a:p>
+            <a:pPr algn="ctr">
+              <a:defRPr sz="1000" b="1">
+                <a:solidFill>
+                  <a:srgbClr val="FFFFFF"/>
+                </a:solidFill>
+                <a:latin typeface="Arial"/>
+              </a:defRPr>
+            </a:pPr>
+            <a:r>
+              <a:t>2. AUTONOMOUS 3-WAY RECONCILIATION ENGINE</a:t>
+            </a:r>
+          </a:p>
+        </p:txBody>
+      </p:sp>
+      <p:sp>
+        <p:nvSpPr>
+          <p:cNvPr id="15367" name="TextBox 15366"/>
+          <p:cNvSpPr txBox="1"/>
+          <p:nvPr/>
+        </p:nvSpPr>
+        <p:spPr>
+          <a:xfrm>
+            <a:off x="457200" y="2852928"/>
+            <a:ext cx="5440680" cy="1207008"/>
+          </a:xfrm>
+          <a:prstGeom prst="rect">
+            <a:avLst/>
+          </a:prstGeom>
+          <a:noFill/>
+        </p:spPr>
+        <p:txBody>
+          <a:bodyPr wrap="square" lIns="18288" rIns="18288" tIns="18288" bIns="18288">
+            <a:spAutoFit/>
+          </a:bodyPr>
+          <a:lstStyle/>
           <a:p>
             <a:pPr>
               <a:spcBef>
-                <a:spcPts val="350"/>
+                <a:spcPts val="0"/>
               </a:spcBef>
             </a:pPr>
             <a:r>
-              <a:rPr sz="950" b="1">
+              <a:rPr sz="850" b="1">
+                <a:solidFill>
+                  <a:srgbClr val="112266"/>
+                </a:solidFill>
+                <a:latin typeface="Arial"/>
+              </a:rPr>
+              <a:t>• Tier 1 Identity Syntax: </a:t>
+            </a:r>
+            <a:r>
+              <a:rPr sz="850">
                 <a:solidFill>
                   <a:srgbClr val="222222"/>
                 </a:solidFill>
                 <a:latin typeface="Arial"/>
               </a:rPr>
-              <a:t>•  Automated Batch Lifecycle: </a:t>
-            </a:r>
-            <a:r>
-              <a:rPr sz="950" b="0">
-                <a:solidFill>
-                  <a:srgbClr val="222222"/>
-                </a:solidFill>
-                <a:latin typeface="Arial"/>
-              </a:rPr>
-              <a:t>Excel/CSV upload -&gt; Smart Header Alias Normalization -&gt; Pre-flight Sandbox -&gt; Atomic 2-Phase Commit.</a:t>
+              <a:t>Dihedral D5 Verhoeff checksum suppresses 100% single-digit and transposition transcription errors.</a:t>
             </a:r>
           </a:p>
           <a:p>
             <a:pPr>
               <a:spcBef>
-                <a:spcPts val="350"/>
+                <a:spcPts val="300"/>
               </a:spcBef>
             </a:pPr>
             <a:r>
-              <a:rPr sz="950" b="1">
+              <a:rPr sz="850" b="1">
+                <a:solidFill>
+                  <a:srgbClr val="112266"/>
+                </a:solidFill>
+                <a:latin typeface="Arial"/>
+              </a:rPr>
+              <a:t>• Tier 2 Quota Ceiling Defense: </a:t>
+            </a:r>
+            <a:r>
+              <a:rPr sz="850">
                 <a:solidFill>
                   <a:srgbClr val="222222"/>
                 </a:solidFill>
                 <a:latin typeface="Arial"/>
               </a:rPr>
-              <a:t>•  Real-Time Regulatory Audit: </a:t>
-            </a:r>
-            <a:r>
-              <a:rPr sz="950" b="0">
-                <a:solidFill>
-                  <a:srgbClr val="222222"/>
-                </a:solidFill>
-                <a:latin typeface="Arial"/>
-              </a:rPr>
-              <a:t>Continuous validation ensures complete institutional record authenticity before official academic census locking.</a:t>
+              <a:t>Strict APH 2026-27 compliance isolates General vs Supernumerary seats (TFW 5%, EWS 10%, KM, NRI/FN 15%).</a:t>
             </a:r>
           </a:p>
           <a:p>
             <a:pPr>
               <a:spcBef>
-                <a:spcPts val="700"/>
+                <a:spcPts val="300"/>
               </a:spcBef>
-              <a:defRPr sz="1100" b="1">
-                <a:solidFill>
-                  <a:srgbClr val="008C6E"/>
+            </a:pPr>
+            <a:r>
+              <a:rPr sz="850" b="1">
+                <a:solidFill>
+                  <a:srgbClr val="112266"/>
+                </a:solidFill>
+                <a:latin typeface="Arial"/>
+              </a:rPr>
+              <a:t>• Tier 3 Collision Radar: </a:t>
+            </a:r>
+            <a:r>
+              <a:rPr sz="850">
+                <a:solidFill>
+                  <a:srgbClr val="222222"/>
+                </a:solidFill>
+                <a:latin typeface="Arial"/>
+              </a:rPr>
+              <a:t>Real-time multi-tenant radar flags fraudulent concurrent active admissions across universities nationwide.</a:t>
+            </a:r>
+          </a:p>
+        </p:txBody>
+      </p:sp>
+      <p:sp>
+        <p:nvSpPr>
+          <p:cNvPr id="15368" name="Rounded Rectangle 15367"/>
+          <p:cNvSpPr/>
+          <p:nvPr/>
+        </p:nvSpPr>
+        <p:spPr>
+          <a:xfrm>
+            <a:off x="365760" y="4206240"/>
+            <a:ext cx="5623560" cy="1417320"/>
+          </a:xfrm>
+          <a:prstGeom prst="roundRect">
+            <a:avLst/>
+          </a:prstGeom>
+          <a:solidFill>
+            <a:srgbClr val="FFFFFF"/>
+          </a:solidFill>
+          <a:ln w="19050">
+            <a:solidFill>
+              <a:srgbClr val="CBD5E1"/>
+            </a:solidFill>
+          </a:ln>
+        </p:spPr>
+        <p:style>
+          <a:lnRef idx="1">
+            <a:schemeClr val="accent1"/>
+          </a:lnRef>
+          <a:fillRef idx="3">
+            <a:schemeClr val="accent1"/>
+          </a:fillRef>
+          <a:effectRef idx="2">
+            <a:schemeClr val="accent1"/>
+          </a:effectRef>
+          <a:fontRef idx="minor">
+            <a:schemeClr val="lt1"/>
+          </a:fontRef>
+        </p:style>
+        <p:txBody>
+          <a:bodyPr rtlCol="0" anchor="ctr"/>
+          <a:lstStyle/>
+          <a:p>
+            <a:pPr algn="ctr"/>
+          </a:p>
+        </p:txBody>
+      </p:sp>
+      <p:sp>
+        <p:nvSpPr>
+          <p:cNvPr id="15369" name="Rounded Rectangle 15368"/>
+          <p:cNvSpPr/>
+          <p:nvPr/>
+        </p:nvSpPr>
+        <p:spPr>
+          <a:xfrm>
+            <a:off x="475488" y="4096512"/>
+            <a:ext cx="5404104" cy="292608"/>
+          </a:xfrm>
+          <a:prstGeom prst="roundRect">
+            <a:avLst/>
+          </a:prstGeom>
+          <a:solidFill>
+            <a:srgbClr val="1A365D"/>
+          </a:solidFill>
+          <a:ln>
+            <a:noFill/>
+          </a:ln>
+        </p:spPr>
+        <p:style>
+          <a:lnRef idx="1">
+            <a:schemeClr val="accent1"/>
+          </a:lnRef>
+          <a:fillRef idx="3">
+            <a:schemeClr val="accent1"/>
+          </a:fillRef>
+          <a:effectRef idx="2">
+            <a:schemeClr val="accent1"/>
+          </a:effectRef>
+          <a:fontRef idx="minor">
+            <a:schemeClr val="lt1"/>
+          </a:fontRef>
+        </p:style>
+        <p:txBody>
+          <a:bodyPr rtlCol="0" anchor="ctr" wrap="none" lIns="73152" rIns="73152"/>
+          <a:lstStyle/>
+          <a:p>
+            <a:pPr algn="ctr">
+              <a:defRPr sz="1000" b="1">
+                <a:solidFill>
+                  <a:srgbClr val="FFFFFF"/>
                 </a:solidFill>
                 <a:latin typeface="Arial"/>
               </a:defRPr>
             </a:pPr>
             <a:r>
-              <a:t>Addressing Core Problem Vulnerabilities</a:t>
-            </a:r>
-          </a:p>
+              <a:t>3. CRYPTOGRAPHIC TRUST &amp; DPDP PRIVACY SHIELD</a:t>
+            </a:r>
+          </a:p>
+        </p:txBody>
+      </p:sp>
+      <p:sp>
+        <p:nvSpPr>
+          <p:cNvPr id="15370" name="TextBox 15369"/>
+          <p:cNvSpPr txBox="1"/>
+          <p:nvPr/>
+        </p:nvSpPr>
+        <p:spPr>
+          <a:xfrm>
+            <a:off x="457200" y="4407408"/>
+            <a:ext cx="5440680" cy="1179576"/>
+          </a:xfrm>
+          <a:prstGeom prst="rect">
+            <a:avLst/>
+          </a:prstGeom>
+          <a:noFill/>
+        </p:spPr>
+        <p:txBody>
+          <a:bodyPr wrap="square" lIns="18288" rIns="18288" tIns="18288" bIns="18288">
+            <a:spAutoFit/>
+          </a:bodyPr>
+          <a:lstStyle/>
           <a:p>
             <a:pPr>
               <a:spcBef>
-                <a:spcPts val="350"/>
+                <a:spcPts val="0"/>
               </a:spcBef>
             </a:pPr>
             <a:r>
-              <a:rPr sz="950" b="1">
+              <a:rPr sz="850" b="1">
+                <a:solidFill>
+                  <a:srgbClr val="1A365D"/>
+                </a:solidFill>
+                <a:latin typeface="Arial"/>
+              </a:rPr>
+              <a:t>• Privacy-by-Design Shield: </a:t>
+            </a:r>
+            <a:r>
+              <a:rPr sz="850">
                 <a:solidFill>
                   <a:srgbClr val="222222"/>
                 </a:solidFill>
                 <a:latin typeface="Arial"/>
               </a:rPr>
-              <a:t>•  Ghost Admissions Elimination: </a:t>
-            </a:r>
-            <a:r>
-              <a:rPr sz="950" b="0">
-                <a:solidFill>
-                  <a:srgbClr val="222222"/>
-                </a:solidFill>
-                <a:latin typeface="Arial"/>
-              </a:rPr>
-              <a:t>Anchors all technical admissions to verified 12-digit national APAAR IDs validated via Verhoeff dihedral D5 permutations.</a:t>
+              <a:t>Keyed HMAC-SHA256 indexing + dynamic masking (XXXX-XXXX-9012) satisfies DPDP Act 2023 with zero plaintext APAAR in DB.</a:t>
             </a:r>
           </a:p>
           <a:p>
             <a:pPr>
               <a:spcBef>
-                <a:spcPts val="350"/>
+                <a:spcPts val="300"/>
               </a:spcBef>
             </a:pPr>
             <a:r>
-              <a:rPr sz="950" b="1">
+              <a:rPr sz="850" b="1">
+                <a:solidFill>
+                  <a:srgbClr val="1A365D"/>
+                </a:solidFill>
+                <a:latin typeface="Arial"/>
+              </a:rPr>
+              <a:t>• Asymmetric Digital Proofs: </a:t>
+            </a:r>
+            <a:r>
+              <a:rPr sz="850">
                 <a:solidFill>
                   <a:srgbClr val="222222"/>
                 </a:solidFill>
                 <a:latin typeface="Arial"/>
               </a:rPr>
-              <a:t>•  Intake Ceiling Enforcement: </a:t>
-            </a:r>
-            <a:r>
-              <a:rPr sz="950" b="0">
-                <a:solidFill>
-                  <a:srgbClr val="222222"/>
-                </a:solidFill>
-                <a:latin typeface="Arial"/>
-              </a:rPr>
-              <a:t>Validates admissions against versioned AICTE Approval Handbook (APH 2026-27) limits (General, TFW 5%, EWS 10%, NRI/FN 15%).</a:t>
+              <a:t>Issues Ed25519 (Curve25519) signed verification receipts with high-density QR codes for offline validation.</a:t>
             </a:r>
           </a:p>
           <a:p>
             <a:pPr>
               <a:spcBef>
-                <a:spcPts val="350"/>
+                <a:spcPts val="300"/>
               </a:spcBef>
             </a:pPr>
             <a:r>
-              <a:rPr sz="950" b="1">
+              <a:rPr sz="850" b="1">
+                <a:solidFill>
+                  <a:srgbClr val="1A365D"/>
+                </a:solidFill>
+                <a:latin typeface="Arial"/>
+              </a:rPr>
+              <a:t>• Tamper-Evident Ledger: </a:t>
+            </a:r>
+            <a:r>
+              <a:rPr sz="850">
                 <a:solidFill>
                   <a:srgbClr val="222222"/>
                 </a:solidFill>
                 <a:latin typeface="Arial"/>
               </a:rPr>
-              <a:t>•  Cross-College Collision Radar: </a:t>
-            </a:r>
-            <a:r>
-              <a:rPr sz="950" b="0">
-                <a:solidFill>
-                  <a:srgbClr val="222222"/>
-                </a:solidFill>
-                <a:latin typeface="Arial"/>
-              </a:rPr>
-              <a:t>Real-time cross-institutional duplicate detection prevents fraudulent concurrent multi-college technical admissions.</a:t>
-            </a:r>
-          </a:p>
-          <a:p>
-            <a:pPr>
-              <a:spcBef>
-                <a:spcPts val="700"/>
-              </a:spcBef>
-              <a:defRPr sz="1100" b="1">
-                <a:solidFill>
-                  <a:srgbClr val="008C6E"/>
+              <a:t>Sequential SHA-256 hash chaining mathematically guarantees non-repudiation across all regulatory actions.</a:t>
+            </a:r>
+          </a:p>
+        </p:txBody>
+      </p:sp>
+      <p:sp>
+        <p:nvSpPr>
+          <p:cNvPr id="15371" name="Rounded Rectangle 15370"/>
+          <p:cNvSpPr/>
+          <p:nvPr/>
+        </p:nvSpPr>
+        <p:spPr>
+          <a:xfrm>
+            <a:off x="6172200" y="1115568"/>
+            <a:ext cx="5623560" cy="4507992"/>
+          </a:xfrm>
+          <a:prstGeom prst="roundRect">
+            <a:avLst/>
+          </a:prstGeom>
+          <a:solidFill>
+            <a:srgbClr val="FFFFFF"/>
+          </a:solidFill>
+          <a:ln w="19050">
+            <a:solidFill>
+              <a:srgbClr val="CBD5E1"/>
+            </a:solidFill>
+          </a:ln>
+        </p:spPr>
+        <p:style>
+          <a:lnRef idx="1">
+            <a:schemeClr val="accent1"/>
+          </a:lnRef>
+          <a:fillRef idx="3">
+            <a:schemeClr val="accent1"/>
+          </a:fillRef>
+          <a:effectRef idx="2">
+            <a:schemeClr val="accent1"/>
+          </a:effectRef>
+          <a:fontRef idx="minor">
+            <a:schemeClr val="lt1"/>
+          </a:fontRef>
+        </p:style>
+        <p:txBody>
+          <a:bodyPr rtlCol="0" anchor="ctr"/>
+          <a:lstStyle/>
+          <a:p>
+            <a:pPr algn="ctr"/>
+          </a:p>
+        </p:txBody>
+      </p:sp>
+      <p:sp>
+        <p:nvSpPr>
+          <p:cNvPr id="15372" name="Rounded Rectangle 15371"/>
+          <p:cNvSpPr/>
+          <p:nvPr/>
+        </p:nvSpPr>
+        <p:spPr>
+          <a:xfrm>
+            <a:off x="6309360" y="1005840"/>
+            <a:ext cx="5349240" cy="310896"/>
+          </a:xfrm>
+          <a:prstGeom prst="roundRect">
+            <a:avLst/>
+          </a:prstGeom>
+          <a:solidFill>
+            <a:srgbClr val="112266"/>
+          </a:solidFill>
+          <a:ln>
+            <a:noFill/>
+          </a:ln>
+        </p:spPr>
+        <p:style>
+          <a:lnRef idx="1">
+            <a:schemeClr val="accent1"/>
+          </a:lnRef>
+          <a:fillRef idx="3">
+            <a:schemeClr val="accent1"/>
+          </a:fillRef>
+          <a:effectRef idx="2">
+            <a:schemeClr val="accent1"/>
+          </a:effectRef>
+          <a:fontRef idx="minor">
+            <a:schemeClr val="lt1"/>
+          </a:fontRef>
+        </p:style>
+        <p:txBody>
+          <a:bodyPr rtlCol="0" anchor="ctr" wrap="none" lIns="73152" rIns="73152"/>
+          <a:lstStyle/>
+          <a:p>
+            <a:pPr algn="ctr">
+              <a:defRPr sz="1000" b="1">
+                <a:solidFill>
+                  <a:srgbClr val="FFFFFF"/>
                 </a:solidFill>
                 <a:latin typeface="Arial"/>
               </a:defRPr>
             </a:pPr>
             <a:r>
-              <a:t>Key Technical Innovations &amp; Security Layer</a:t>
-            </a:r>
-          </a:p>
-          <a:p>
-            <a:pPr>
-              <a:spcBef>
-                <a:spcPts val="350"/>
-              </a:spcBef>
-            </a:pPr>
-            <a:r>
-              <a:rPr sz="950" b="1">
-                <a:solidFill>
-                  <a:srgbClr val="222222"/>
-                </a:solidFill>
-                <a:latin typeface="Arial"/>
-              </a:rPr>
-              <a:t>•  Zero Plaintext Storage: </a:t>
-            </a:r>
-            <a:r>
-              <a:rPr sz="950" b="0">
-                <a:solidFill>
-                  <a:srgbClr val="222222"/>
-                </a:solidFill>
-                <a:latin typeface="Arial"/>
-              </a:rPr>
-              <a:t>Keyed HMAC-SHA256 indexing + dynamic masking (XXXX-XXXX-9012) satisfies DPDP Act 2023 without searchable plaintext exposure.</a:t>
-            </a:r>
-          </a:p>
-          <a:p>
-            <a:pPr>
-              <a:spcBef>
-                <a:spcPts val="350"/>
-              </a:spcBef>
-            </a:pPr>
-            <a:r>
-              <a:rPr sz="950" b="1">
-                <a:solidFill>
-                  <a:srgbClr val="222222"/>
-                </a:solidFill>
-                <a:latin typeface="Arial"/>
-              </a:rPr>
-              <a:t>•  Asymmetric Verifiability: </a:t>
-            </a:r>
-            <a:r>
-              <a:rPr sz="950" b="0">
-                <a:solidFill>
-                  <a:srgbClr val="222222"/>
-                </a:solidFill>
-                <a:latin typeface="Arial"/>
-              </a:rPr>
-              <a:t>Issues Ed25519 (Curve25519) digitally signed verification receipts with high-density QR codes (zero PII in public URLs).</a:t>
-            </a:r>
-          </a:p>
-          <a:p>
-            <a:pPr>
-              <a:spcBef>
-                <a:spcPts val="350"/>
-              </a:spcBef>
-            </a:pPr>
-            <a:r>
-              <a:rPr sz="950" b="1">
-                <a:solidFill>
-                  <a:srgbClr val="222222"/>
-                </a:solidFill>
-                <a:latin typeface="Arial"/>
-              </a:rPr>
-              <a:t>•  Tamper-Evident Ledger: </a:t>
-            </a:r>
-            <a:r>
-              <a:rPr sz="950" b="0">
-                <a:solidFill>
-                  <a:srgbClr val="222222"/>
-                </a:solidFill>
-                <a:latin typeface="Arial"/>
-              </a:rPr>
-              <a:t>Sequential SHA-256 cryptographic hash chain guarantees non-repudiation and detects single-bit database modifications.</a:t>
+              <a:t>LIVE PRODUCTION APEX COMMAND CENTER (IMPLEMENTED UI)</a:t>
             </a:r>
           </a:p>
         </p:txBody>
       </p:sp>
       <p:pic>
         <p:nvPicPr>
-          <p:cNvPr id="15363" name="Picture 15362" descr="dashboard_overview.png"/>
+          <p:cNvPr id="15373" name="Picture 15372" descr="dashboard_overview.png"/>
           <p:cNvPicPr>
             <a:picLocks noChangeAspect="1"/>
           </p:cNvPicPr>
@@ -6626,8 +7000,8 @@
         </p:blipFill>
         <p:spPr>
           <a:xfrm>
-            <a:off x="6720840" y="1188720"/>
-            <a:ext cx="5074920" cy="3383280"/>
+            <a:off x="6281928" y="1371600"/>
+            <a:ext cx="5404104" cy="2971800"/>
           </a:xfrm>
           <a:prstGeom prst="rect">
             <a:avLst/>
@@ -6636,14 +7010,14 @@
       </p:pic>
       <p:sp>
         <p:nvSpPr>
-          <p:cNvPr id="15364" name="TextBox 15363"/>
+          <p:cNvPr id="15374" name="TextBox 15373"/>
           <p:cNvSpPr txBox="1"/>
           <p:nvPr/>
         </p:nvSpPr>
         <p:spPr>
           <a:xfrm>
-            <a:off x="6720840" y="4681728"/>
-            <a:ext cx="5074920" cy="1417320"/>
+            <a:off x="6281928" y="4407408"/>
+            <a:ext cx="5404104" cy="1143000"/>
           </a:xfrm>
           <a:prstGeom prst="rect">
             <a:avLst/>
@@ -6651,21 +7025,33 @@
           <a:noFill/>
         </p:spPr>
         <p:txBody>
-          <a:bodyPr wrap="square" lIns="45720" rIns="45720" tIns="18288" bIns="18288">
+          <a:bodyPr wrap="square" lIns="0" rIns="0" tIns="0" bIns="0">
             <a:spAutoFit/>
           </a:bodyPr>
           <a:lstStyle/>
           <a:p>
             <a:pPr>
-              <a:defRPr sz="850" b="1">
+              <a:spcBef>
+                <a:spcPts val="0"/>
+              </a:spcBef>
+            </a:pPr>
+            <a:r>
+              <a:rPr sz="850" b="1">
                 <a:solidFill>
                   <a:srgbClr val="008C6E"/>
                 </a:solidFill>
                 <a:latin typeface="Arial"/>
-              </a:defRPr>
-            </a:pPr>
-            <a:r>
-              <a:t>PROTOTYPE EVIDENCE &amp; LIVE VERIFICATION</a:t>
+              </a:rPr>
+              <a:t>🏛️ AICTE Apex Command Center: </a:t>
+            </a:r>
+            <a:r>
+              <a:rPr sz="819">
+                <a:solidFill>
+                  <a:srgbClr val="222222"/>
+                </a:solidFill>
+                <a:latin typeface="Arial"/>
+              </a:rPr>
+              <a:t>Dr. Sunita Deshmukh workspace continuously validating 1,150 sanctioned seats.</a:t>
             </a:r>
           </a:p>
           <a:p>
@@ -6673,15 +7059,269 @@
               <a:spcBef>
                 <a:spcPts val="200"/>
               </a:spcBef>
-              <a:defRPr sz="850" i="1">
-                <a:solidFill>
-                  <a:srgbClr val="5A5A5A"/>
+            </a:pPr>
+            <a:r>
+              <a:rPr sz="850" b="1">
+                <a:solidFill>
+                  <a:srgbClr val="008C6E"/>
+                </a:solidFill>
+                <a:latin typeface="Arial"/>
+              </a:rPr>
+              <a:t>📊 Real-Time Intake Intelligence: </a:t>
+            </a:r>
+            <a:r>
+              <a:rPr sz="819">
+                <a:solidFill>
+                  <a:srgbClr val="222222"/>
+                </a:solidFill>
+                <a:latin typeface="Arial"/>
+              </a:rPr>
+              <a:t>Live intake vs enrolment tracking across B.Tech CSE, ECE, Mech, MCA + Quota breakdown.</a:t>
+            </a:r>
+          </a:p>
+          <a:p>
+            <a:pPr>
+              <a:spcBef>
+                <a:spcPts val="200"/>
+              </a:spcBef>
+            </a:pPr>
+            <a:r>
+              <a:rPr sz="850" b="1">
+                <a:solidFill>
+                  <a:srgbClr val="008C6E"/>
+                </a:solidFill>
+                <a:latin typeface="Arial"/>
+              </a:rPr>
+              <a:t>⚡ Multi-Tenant Role Switcher: </a:t>
+            </a:r>
+            <a:r>
+              <a:rPr sz="819">
+                <a:solidFill>
+                  <a:srgbClr val="222222"/>
+                </a:solidFill>
+                <a:latin typeface="Arial"/>
+              </a:rPr>
+              <a:t>Instant workspace toggling between AICTE Central, DTU Delhi, and COEP Pune desks.</a:t>
+            </a:r>
+          </a:p>
+        </p:txBody>
+      </p:sp>
+      <p:sp>
+        <p:nvSpPr>
+          <p:cNvPr id="15375" name="Rounded Rectangle 15374"/>
+          <p:cNvSpPr/>
+          <p:nvPr/>
+        </p:nvSpPr>
+        <p:spPr>
+          <a:xfrm>
+            <a:off x="365760" y="5779008"/>
+            <a:ext cx="2194560" cy="292608"/>
+          </a:xfrm>
+          <a:prstGeom prst="roundRect">
+            <a:avLst/>
+          </a:prstGeom>
+          <a:solidFill>
+            <a:srgbClr val="F8FAFC"/>
+          </a:solidFill>
+          <a:ln w="19050">
+            <a:solidFill>
+              <a:srgbClr val="008C6E"/>
+            </a:solidFill>
+          </a:ln>
+        </p:spPr>
+        <p:style>
+          <a:lnRef idx="1">
+            <a:schemeClr val="accent1"/>
+          </a:lnRef>
+          <a:fillRef idx="3">
+            <a:schemeClr val="accent1"/>
+          </a:fillRef>
+          <a:effectRef idx="2">
+            <a:schemeClr val="accent1"/>
+          </a:effectRef>
+          <a:fontRef idx="minor">
+            <a:schemeClr val="lt1"/>
+          </a:fontRef>
+        </p:style>
+        <p:txBody>
+          <a:bodyPr rtlCol="0" anchor="ctr" lIns="0" rIns="0"/>
+          <a:lstStyle/>
+          <a:p>
+            <a:pPr algn="ctr">
+              <a:defRPr sz="850" b="1">
+                <a:solidFill>
+                  <a:srgbClr val="008C6E"/>
                 </a:solidFill>
                 <a:latin typeface="Arial"/>
               </a:defRPr>
             </a:pPr>
             <a:r>
-              <a:t>AICTE National Command Center (/dashboard) featuring live sanctioned vs verified intake metrics, affirmative action quotas, duplicate conflict alerts, and real-time audit ledger feeds.</a:t>
+              <a:t>✓ 100% Deterministic Engine</a:t>
+            </a:r>
+          </a:p>
+        </p:txBody>
+      </p:sp>
+      <p:sp>
+        <p:nvSpPr>
+          <p:cNvPr id="15376" name="Rounded Rectangle 15375"/>
+          <p:cNvSpPr/>
+          <p:nvPr/>
+        </p:nvSpPr>
+        <p:spPr>
+          <a:xfrm>
+            <a:off x="3383280" y="5779008"/>
+            <a:ext cx="2194560" cy="292608"/>
+          </a:xfrm>
+          <a:prstGeom prst="roundRect">
+            <a:avLst/>
+          </a:prstGeom>
+          <a:solidFill>
+            <a:srgbClr val="F8FAFC"/>
+          </a:solidFill>
+          <a:ln w="19050">
+            <a:solidFill>
+              <a:srgbClr val="112266"/>
+            </a:solidFill>
+          </a:ln>
+        </p:spPr>
+        <p:style>
+          <a:lnRef idx="1">
+            <a:schemeClr val="accent1"/>
+          </a:lnRef>
+          <a:fillRef idx="3">
+            <a:schemeClr val="accent1"/>
+          </a:fillRef>
+          <a:effectRef idx="2">
+            <a:schemeClr val="accent1"/>
+          </a:effectRef>
+          <a:fontRef idx="minor">
+            <a:schemeClr val="lt1"/>
+          </a:fontRef>
+        </p:style>
+        <p:txBody>
+          <a:bodyPr rtlCol="0" anchor="ctr" lIns="0" rIns="0"/>
+          <a:lstStyle/>
+          <a:p>
+            <a:pPr algn="ctr">
+              <a:defRPr sz="850" b="1">
+                <a:solidFill>
+                  <a:srgbClr val="112266"/>
+                </a:solidFill>
+                <a:latin typeface="Arial"/>
+              </a:defRPr>
+            </a:pPr>
+            <a:r>
+              <a:t>⚡ &lt;50ms Asymmetric Verification</a:t>
+            </a:r>
+          </a:p>
+        </p:txBody>
+      </p:sp>
+      <p:sp>
+        <p:nvSpPr>
+          <p:cNvPr id="15377" name="Rounded Rectangle 15376"/>
+          <p:cNvSpPr/>
+          <p:nvPr/>
+        </p:nvSpPr>
+        <p:spPr>
+          <a:xfrm>
+            <a:off x="6492240" y="5779008"/>
+            <a:ext cx="2194560" cy="292608"/>
+          </a:xfrm>
+          <a:prstGeom prst="roundRect">
+            <a:avLst/>
+          </a:prstGeom>
+          <a:solidFill>
+            <a:srgbClr val="F8FAFC"/>
+          </a:solidFill>
+          <a:ln w="19050">
+            <a:solidFill>
+              <a:srgbClr val="1A365D"/>
+            </a:solidFill>
+          </a:ln>
+        </p:spPr>
+        <p:style>
+          <a:lnRef idx="1">
+            <a:schemeClr val="accent1"/>
+          </a:lnRef>
+          <a:fillRef idx="3">
+            <a:schemeClr val="accent1"/>
+          </a:fillRef>
+          <a:effectRef idx="2">
+            <a:schemeClr val="accent1"/>
+          </a:effectRef>
+          <a:fontRef idx="minor">
+            <a:schemeClr val="lt1"/>
+          </a:fontRef>
+        </p:style>
+        <p:txBody>
+          <a:bodyPr rtlCol="0" anchor="ctr" lIns="0" rIns="0"/>
+          <a:lstStyle/>
+          <a:p>
+            <a:pPr algn="ctr">
+              <a:defRPr sz="850" b="1">
+                <a:solidFill>
+                  <a:srgbClr val="1A365D"/>
+                </a:solidFill>
+                <a:latin typeface="Arial"/>
+              </a:defRPr>
+            </a:pPr>
+            <a:r>
+              <a:t>🔒 Zero Plaintext APAAR Storage</a:t>
+            </a:r>
+          </a:p>
+        </p:txBody>
+      </p:sp>
+      <p:sp>
+        <p:nvSpPr>
+          <p:cNvPr id="15378" name="Rounded Rectangle 15377"/>
+          <p:cNvSpPr/>
+          <p:nvPr/>
+        </p:nvSpPr>
+        <p:spPr>
+          <a:xfrm>
+            <a:off x="9601200" y="5779008"/>
+            <a:ext cx="2194560" cy="292608"/>
+          </a:xfrm>
+          <a:prstGeom prst="roundRect">
+            <a:avLst/>
+          </a:prstGeom>
+          <a:solidFill>
+            <a:srgbClr val="F8FAFC"/>
+          </a:solidFill>
+          <a:ln w="19050">
+            <a:solidFill>
+              <a:srgbClr val="008C6E"/>
+            </a:solidFill>
+          </a:ln>
+        </p:spPr>
+        <p:style>
+          <a:lnRef idx="1">
+            <a:schemeClr val="accent1"/>
+          </a:lnRef>
+          <a:fillRef idx="3">
+            <a:schemeClr val="accent1"/>
+          </a:fillRef>
+          <a:effectRef idx="2">
+            <a:schemeClr val="accent1"/>
+          </a:effectRef>
+          <a:fontRef idx="minor">
+            <a:schemeClr val="lt1"/>
+          </a:fontRef>
+        </p:style>
+        <p:txBody>
+          <a:bodyPr rtlCol="0" anchor="ctr" lIns="0" rIns="0"/>
+          <a:lstStyle/>
+          <a:p>
+            <a:pPr algn="ctr">
+              <a:defRPr sz="850" b="1">
+                <a:solidFill>
+                  <a:srgbClr val="008C6E"/>
+                </a:solidFill>
+                <a:latin typeface="Arial"/>
+              </a:defRPr>
+            </a:pPr>
+            <a:r>
+              <a:t>🛡️ 59/59 Automated Tests Passing</a:t>
             </a:r>
           </a:p>
         </p:txBody>
@@ -6787,8 +7427,8 @@
         </p:nvSpPr>
         <p:spPr>
           <a:xfrm>
-            <a:off x="1645920" y="164592"/>
-            <a:ext cx="8046720" cy="777240"/>
+            <a:off x="1691640" y="164592"/>
+            <a:ext cx="8092440" cy="777240"/>
           </a:xfrm>
         </p:spPr>
         <p:txBody>
@@ -6796,7 +7436,7 @@
           <a:lstStyle/>
           <a:p>
             <a:pPr eaLnBrk="1" hangingPunct="1" algn="l">
-              <a:defRPr sz="1700" b="1">
+              <a:defRPr sz="1650" b="1">
                 <a:solidFill>
                   <a:srgbClr val="112266"/>
                 </a:solidFill>
@@ -6804,7 +7444,7 @@
               </a:defRPr>
             </a:pPr>
             <a:r>
-              <a:t>TECHNICAL APPROACH &amp; DECOUPLED GOVERNANCE ARCHITECTURE</a:t>
+              <a:t>TECHNICAL APPROACH: 4-LAYER DECOUPLED ARCHITECTURE &amp; PIPELINE</a:t>
             </a:r>
           </a:p>
         </p:txBody>
@@ -6969,309 +7609,52 @@
       </p:pic>
       <p:sp>
         <p:nvSpPr>
-          <p:cNvPr id="17410" name="TextBox 17409"/>
-          <p:cNvSpPr txBox="1"/>
+          <p:cNvPr id="17410" name="Rounded Rectangle 17409"/>
+          <p:cNvSpPr/>
           <p:nvPr/>
         </p:nvSpPr>
         <p:spPr>
           <a:xfrm>
             <a:off x="365760" y="1115568"/>
-            <a:ext cx="6217920" cy="5029200"/>
+            <a:ext cx="6858000" cy="4983480"/>
           </a:xfrm>
-          <a:prstGeom prst="rect">
+          <a:prstGeom prst="roundRect">
             <a:avLst/>
           </a:prstGeom>
-          <a:noFill/>
-        </p:spPr>
-        <p:txBody>
-          <a:bodyPr wrap="square" lIns="45720" rIns="45720">
-            <a:spAutoFit/>
-          </a:bodyPr>
+          <a:solidFill>
+            <a:srgbClr val="FFFFFF"/>
+          </a:solidFill>
+          <a:ln w="19050">
+            <a:solidFill>
+              <a:srgbClr val="CBD5E1"/>
+            </a:solidFill>
+          </a:ln>
+        </p:spPr>
+        <p:style>
+          <a:lnRef idx="1">
+            <a:schemeClr val="accent1"/>
+          </a:lnRef>
+          <a:fillRef idx="3">
+            <a:schemeClr val="accent1"/>
+          </a:fillRef>
+          <a:effectRef idx="2">
+            <a:schemeClr val="accent1"/>
+          </a:effectRef>
+          <a:fontRef idx="minor">
+            <a:schemeClr val="lt1"/>
+          </a:fontRef>
+        </p:style>
+        <p:txBody>
+          <a:bodyPr rtlCol="0" anchor="ctr"/>
           <a:lstStyle/>
           <a:p>
-            <a:pPr>
-              <a:defRPr sz="1100" b="1">
-                <a:solidFill>
-                  <a:srgbClr val="008C6E"/>
-                </a:solidFill>
-                <a:latin typeface="Arial"/>
-              </a:defRPr>
-            </a:pPr>
-            <a:r>
-              <a:t>Core Production Technology Stack</a:t>
-            </a:r>
-          </a:p>
-          <a:p>
-            <a:pPr>
-              <a:spcBef>
-                <a:spcPts val="350"/>
-              </a:spcBef>
-            </a:pPr>
-            <a:r>
-              <a:rPr sz="950" b="1">
-                <a:solidFill>
-                  <a:srgbClr val="222222"/>
-                </a:solidFill>
-                <a:latin typeface="Arial"/>
-              </a:rPr>
-              <a:t>•  Frontend Architecture: </a:t>
-            </a:r>
-            <a:r>
-              <a:rPr sz="950" b="0">
-                <a:solidFill>
-                  <a:srgbClr val="222222"/>
-                </a:solidFill>
-                <a:latin typeface="Arial"/>
-              </a:rPr>
-              <a:t>Next.js 14 App Router, TypeScript (Strict), Tailwind CSS, Lucide Icons, Recharts Analytics.</a:t>
-            </a:r>
-          </a:p>
-          <a:p>
-            <a:pPr>
-              <a:spcBef>
-                <a:spcPts val="350"/>
-              </a:spcBef>
-            </a:pPr>
-            <a:r>
-              <a:rPr sz="950" b="1">
-                <a:solidFill>
-                  <a:srgbClr val="222222"/>
-                </a:solidFill>
-                <a:latin typeface="Arial"/>
-              </a:rPr>
-              <a:t>•  Backend Micro-Services: </a:t>
-            </a:r>
-            <a:r>
-              <a:rPr sz="950" b="0">
-                <a:solidFill>
-                  <a:srgbClr val="222222"/>
-                </a:solidFill>
-                <a:latin typeface="Arial"/>
-              </a:rPr>
-              <a:t>Python 3.10+, FastAPI (Modular Monolith), Pydantic v2, Uvicorn, OpenAPI 3.1 REST contracts.</a:t>
-            </a:r>
-          </a:p>
-          <a:p>
-            <a:pPr>
-              <a:spcBef>
-                <a:spcPts val="350"/>
-              </a:spcBef>
-            </a:pPr>
-            <a:r>
-              <a:rPr sz="950" b="1">
-                <a:solidFill>
-                  <a:srgbClr val="222222"/>
-                </a:solidFill>
-                <a:latin typeface="Arial"/>
-              </a:rPr>
-              <a:t>•  Persistence &amp; Cloud DB: </a:t>
-            </a:r>
-            <a:r>
-              <a:rPr sz="950" b="0">
-                <a:solidFill>
-                  <a:srgbClr val="222222"/>
-                </a:solidFill>
-                <a:latin typeface="Arial"/>
-              </a:rPr>
-              <a:t>Supabase Cloud PostgreSQL (Port 6543 pooler, RLS policies) / SQLite WAL zero-setup local dev.</a:t>
-            </a:r>
-          </a:p>
-          <a:p>
-            <a:pPr>
-              <a:spcBef>
-                <a:spcPts val="350"/>
-              </a:spcBef>
-            </a:pPr>
-            <a:r>
-              <a:rPr sz="950" b="1">
-                <a:solidFill>
-                  <a:srgbClr val="222222"/>
-                </a:solidFill>
-                <a:latin typeface="Arial"/>
-              </a:rPr>
-              <a:t>•  Security &amp; Cryptography: </a:t>
-            </a:r>
-            <a:r>
-              <a:rPr sz="950" b="0">
-                <a:solidFill>
-                  <a:srgbClr val="222222"/>
-                </a:solidFill>
-                <a:latin typeface="Arial"/>
-              </a:rPr>
-              <a:t>Ed25519 asymmetric signatures (PyNaCl/RFC 8032), Keyed HMAC-SHA256, bcrypt password hashing.</a:t>
-            </a:r>
-          </a:p>
-          <a:p>
-            <a:pPr>
-              <a:spcBef>
-                <a:spcPts val="350"/>
-              </a:spcBef>
-            </a:pPr>
-            <a:r>
-              <a:rPr sz="950" b="1">
-                <a:solidFill>
-                  <a:srgbClr val="222222"/>
-                </a:solidFill>
-                <a:latin typeface="Arial"/>
-              </a:rPr>
-              <a:t>•  Resilient Ingestion Core: </a:t>
-            </a:r>
-            <a:r>
-              <a:rPr sz="950" b="0">
-                <a:solidFill>
-                  <a:srgbClr val="222222"/>
-                </a:solidFill>
-                <a:latin typeface="Arial"/>
-              </a:rPr>
-              <a:t>Pandas &amp; OpenPyXL with regex normalizer for fault-tolerant tabular parsing across diverse ERP schemas.</a:t>
-            </a:r>
-          </a:p>
-          <a:p>
-            <a:pPr>
-              <a:spcBef>
-                <a:spcPts val="700"/>
-              </a:spcBef>
-              <a:defRPr sz="1100" b="1">
-                <a:solidFill>
-                  <a:srgbClr val="008C6E"/>
-                </a:solidFill>
-                <a:latin typeface="Arial"/>
-              </a:defRPr>
-            </a:pPr>
-            <a:r>
-              <a:t>5-Tier Implementation Methodology &amp; Pipeline</a:t>
-            </a:r>
-          </a:p>
-          <a:p>
-            <a:pPr>
-              <a:spcBef>
-                <a:spcPts val="350"/>
-              </a:spcBef>
-            </a:pPr>
-            <a:r>
-              <a:rPr sz="950" b="1">
-                <a:solidFill>
-                  <a:srgbClr val="222222"/>
-                </a:solidFill>
-                <a:latin typeface="Arial"/>
-              </a:rPr>
-              <a:t>•  1. Resilient Ingestion Desk: </a:t>
-            </a:r>
-            <a:r>
-              <a:rPr sz="950" b="0">
-                <a:solidFill>
-                  <a:srgbClr val="222222"/>
-                </a:solidFill>
-                <a:latin typeface="Arial"/>
-              </a:rPr>
-              <a:t>Sub-50ms fuzzy alias matching resolves inconsistent college column headers (e.g., student_apaar &lt;-&gt; apaar_id).</a:t>
-            </a:r>
-          </a:p>
-          <a:p>
-            <a:pPr>
-              <a:spcBef>
-                <a:spcPts val="350"/>
-              </a:spcBef>
-            </a:pPr>
-            <a:r>
-              <a:rPr sz="950" b="1">
-                <a:solidFill>
-                  <a:srgbClr val="222222"/>
-                </a:solidFill>
-                <a:latin typeface="Arial"/>
-              </a:rPr>
-              <a:t>•  2. Pre-flight Validation Gate: </a:t>
-            </a:r>
-            <a:r>
-              <a:rPr sz="950" b="0">
-                <a:solidFill>
-                  <a:srgbClr val="222222"/>
-                </a:solidFill>
-                <a:latin typeface="Arial"/>
-              </a:rPr>
-              <a:t>Quarantines rows; executes Verhoeff identity syntax, approved intake bounds, and supernumerary quota isolation.</a:t>
-            </a:r>
-          </a:p>
-          <a:p>
-            <a:pPr>
-              <a:spcBef>
-                <a:spcPts val="350"/>
-              </a:spcBef>
-            </a:pPr>
-            <a:r>
-              <a:rPr sz="950" b="1">
-                <a:solidFill>
-                  <a:srgbClr val="222222"/>
-                </a:solidFill>
-                <a:latin typeface="Arial"/>
-              </a:rPr>
-              <a:t>•  3. Atomic Staging Sandbox: </a:t>
-            </a:r>
-            <a:r>
-              <a:rPr sz="950" b="0">
-                <a:solidFill>
-                  <a:srgbClr val="222222"/>
-                </a:solidFill>
-                <a:latin typeface="Arial"/>
-              </a:rPr>
-              <a:t>Enables in-browser spreadsheet inspection, error highlighting, and inline corrections prior to permanent submission.</a:t>
-            </a:r>
-          </a:p>
-          <a:p>
-            <a:pPr>
-              <a:spcBef>
-                <a:spcPts val="350"/>
-              </a:spcBef>
-            </a:pPr>
-            <a:r>
-              <a:rPr sz="950" b="1">
-                <a:solidFill>
-                  <a:srgbClr val="222222"/>
-                </a:solidFill>
-                <a:latin typeface="Arial"/>
-              </a:rPr>
-              <a:t>•  4. Regulatory Adjudication: </a:t>
-            </a:r>
-            <a:r>
-              <a:rPr sz="950" b="0">
-                <a:solidFill>
-                  <a:srgbClr val="222222"/>
-                </a:solidFill>
-                <a:latin typeface="Arial"/>
-              </a:rPr>
-              <a:t>Automated double-enrollment radar triggers dispute hearings with recorded reviewer remarks and college notices.</a:t>
-            </a:r>
-          </a:p>
-          <a:p>
-            <a:pPr>
-              <a:spcBef>
-                <a:spcPts val="350"/>
-              </a:spcBef>
-            </a:pPr>
-            <a:r>
-              <a:rPr sz="950" b="1">
-                <a:solidFill>
-                  <a:srgbClr val="222222"/>
-                </a:solidFill>
-                <a:latin typeface="Arial"/>
-              </a:rPr>
-              <a:t>•  5. Cryptographic Proof Engine: </a:t>
-            </a:r>
-            <a:r>
-              <a:rPr sz="950" b="0">
-                <a:solidFill>
-                  <a:srgbClr val="222222"/>
-                </a:solidFill>
-                <a:latin typeface="Arial"/>
-              </a:rPr>
-              <a:t>Issues Ed25519 signed verification receipts and appends tamper-evident SHA-256 audit ledger events.</a:t>
-            </a:r>
+            <a:pPr algn="ctr"/>
           </a:p>
         </p:txBody>
       </p:sp>
       <p:pic>
         <p:nvPicPr>
-          <p:cNvPr id="17411" name="Picture 17410" descr="uploads_page.png"/>
+          <p:cNvPr id="17411" name="Picture 17410" descr="pramaan_system_architecture.png"/>
           <p:cNvPicPr>
             <a:picLocks noChangeAspect="1"/>
           </p:cNvPicPr>
@@ -7285,8 +7668,8 @@
         </p:blipFill>
         <p:spPr>
           <a:xfrm>
-            <a:off x="6720840" y="1188720"/>
-            <a:ext cx="5074920" cy="3383280"/>
+            <a:off x="438912" y="1188720"/>
+            <a:ext cx="6711696" cy="4828032"/>
           </a:xfrm>
           <a:prstGeom prst="rect">
             <a:avLst/>
@@ -7295,14 +7678,112 @@
       </p:pic>
       <p:sp>
         <p:nvSpPr>
-          <p:cNvPr id="17412" name="TextBox 17411"/>
+          <p:cNvPr id="17412" name="Rounded Rectangle 17411"/>
+          <p:cNvSpPr/>
+          <p:nvPr/>
+        </p:nvSpPr>
+        <p:spPr>
+          <a:xfrm>
+            <a:off x="7452360" y="1115568"/>
+            <a:ext cx="4389120" cy="2971800"/>
+          </a:xfrm>
+          <a:prstGeom prst="roundRect">
+            <a:avLst/>
+          </a:prstGeom>
+          <a:solidFill>
+            <a:srgbClr val="FFFFFF"/>
+          </a:solidFill>
+          <a:ln w="19050">
+            <a:solidFill>
+              <a:srgbClr val="CBD5E1"/>
+            </a:solidFill>
+          </a:ln>
+        </p:spPr>
+        <p:style>
+          <a:lnRef idx="1">
+            <a:schemeClr val="accent1"/>
+          </a:lnRef>
+          <a:fillRef idx="3">
+            <a:schemeClr val="accent1"/>
+          </a:fillRef>
+          <a:effectRef idx="2">
+            <a:schemeClr val="accent1"/>
+          </a:effectRef>
+          <a:fontRef idx="minor">
+            <a:schemeClr val="lt1"/>
+          </a:fontRef>
+        </p:style>
+        <p:txBody>
+          <a:bodyPr rtlCol="0" anchor="ctr"/>
+          <a:lstStyle/>
+          <a:p>
+            <a:pPr algn="ctr"/>
+          </a:p>
+        </p:txBody>
+      </p:sp>
+      <p:sp>
+        <p:nvSpPr>
+          <p:cNvPr id="17413" name="Rounded Rectangle 17412"/>
+          <p:cNvSpPr/>
+          <p:nvPr/>
+        </p:nvSpPr>
+        <p:spPr>
+          <a:xfrm>
+            <a:off x="7589520" y="987552"/>
+            <a:ext cx="4114800" cy="329184"/>
+          </a:xfrm>
+          <a:prstGeom prst="roundRect">
+            <a:avLst/>
+          </a:prstGeom>
+          <a:solidFill>
+            <a:srgbClr val="112266"/>
+          </a:solidFill>
+          <a:ln>
+            <a:noFill/>
+          </a:ln>
+        </p:spPr>
+        <p:style>
+          <a:lnRef idx="1">
+            <a:schemeClr val="accent1"/>
+          </a:lnRef>
+          <a:fillRef idx="3">
+            <a:schemeClr val="accent1"/>
+          </a:fillRef>
+          <a:effectRef idx="2">
+            <a:schemeClr val="accent1"/>
+          </a:effectRef>
+          <a:fontRef idx="minor">
+            <a:schemeClr val="lt1"/>
+          </a:fontRef>
+        </p:style>
+        <p:txBody>
+          <a:bodyPr rtlCol="0" anchor="ctr" wrap="none" lIns="73152" rIns="73152"/>
+          <a:lstStyle/>
+          <a:p>
+            <a:pPr algn="ctr">
+              <a:defRPr sz="1000" b="1">
+                <a:solidFill>
+                  <a:srgbClr val="FFFFFF"/>
+                </a:solidFill>
+                <a:latin typeface="Arial"/>
+              </a:defRPr>
+            </a:pPr>
+            <a:r>
+              <a:t>5-STAGE RECONCILIATION PIPELINE</a:t>
+            </a:r>
+          </a:p>
+        </p:txBody>
+      </p:sp>
+      <p:sp>
+        <p:nvSpPr>
+          <p:cNvPr id="17414" name="TextBox 17413"/>
           <p:cNvSpPr txBox="1"/>
           <p:nvPr/>
         </p:nvSpPr>
         <p:spPr>
           <a:xfrm>
-            <a:off x="6720840" y="4681728"/>
-            <a:ext cx="5074920" cy="1417320"/>
+            <a:off x="7543800" y="1353312"/>
+            <a:ext cx="4206240" cy="2651760"/>
           </a:xfrm>
           <a:prstGeom prst="rect">
             <a:avLst/>
@@ -7310,37 +7791,354 @@
           <a:noFill/>
         </p:spPr>
         <p:txBody>
-          <a:bodyPr wrap="square" lIns="45720" rIns="45720" tIns="18288" bIns="18288">
+          <a:bodyPr wrap="square" lIns="36576" rIns="36576" tIns="36576" bIns="36576">
             <a:spAutoFit/>
           </a:bodyPr>
           <a:lstStyle/>
           <a:p>
             <a:pPr>
-              <a:defRPr sz="850" b="1">
+              <a:spcBef>
+                <a:spcPts val="0"/>
+              </a:spcBef>
+            </a:pPr>
+            <a:r>
+              <a:rPr sz="900" b="1">
                 <a:solidFill>
                   <a:srgbClr val="008C6E"/>
                 </a:solidFill>
                 <a:latin typeface="Arial"/>
-              </a:defRPr>
-            </a:pPr>
-            <a:r>
-              <a:t>PROTOTYPE EVIDENCE &amp; LIVE VERIFICATION</a:t>
+              </a:rPr>
+              <a:t>1. Fuzzy Ingestion Desk: </a:t>
+            </a:r>
+            <a:r>
+              <a:rPr sz="900">
+                <a:solidFill>
+                  <a:srgbClr val="222222"/>
+                </a:solidFill>
+                <a:latin typeface="Arial"/>
+              </a:rPr>
+              <a:t>Sub-50ms regex mapping resolves conflicting column names (e.g., student_apaar &lt;-&gt; apaar_id).</a:t>
             </a:r>
           </a:p>
           <a:p>
             <a:pPr>
               <a:spcBef>
-                <a:spcPts val="200"/>
+                <a:spcPts val="400"/>
               </a:spcBef>
-              <a:defRPr sz="850" i="1">
-                <a:solidFill>
-                  <a:srgbClr val="5A5A5A"/>
+            </a:pPr>
+            <a:r>
+              <a:rPr sz="900" b="1">
+                <a:solidFill>
+                  <a:srgbClr val="008C6E"/>
+                </a:solidFill>
+                <a:latin typeface="Arial"/>
+              </a:rPr>
+              <a:t>2. Pre-flight Quarantine: </a:t>
+            </a:r>
+            <a:r>
+              <a:rPr sz="900">
+                <a:solidFill>
+                  <a:srgbClr val="222222"/>
+                </a:solidFill>
+                <a:latin typeface="Arial"/>
+              </a:rPr>
+              <a:t>Validates Verhoeff syntax, sanctioned capacity limits, and isolates supernumerary quotas.</a:t>
+            </a:r>
+          </a:p>
+          <a:p>
+            <a:pPr>
+              <a:spcBef>
+                <a:spcPts val="400"/>
+              </a:spcBef>
+            </a:pPr>
+            <a:r>
+              <a:rPr sz="900" b="1">
+                <a:solidFill>
+                  <a:srgbClr val="008C6E"/>
+                </a:solidFill>
+                <a:latin typeface="Arial"/>
+              </a:rPr>
+              <a:t>3. Interactive Sandbox: </a:t>
+            </a:r>
+            <a:r>
+              <a:rPr sz="900">
+                <a:solidFill>
+                  <a:srgbClr val="222222"/>
+                </a:solidFill>
+                <a:latin typeface="Arial"/>
+              </a:rPr>
+              <a:t>In-browser spreadsheet enables inline corrections prior to permanent council commit.</a:t>
+            </a:r>
+          </a:p>
+          <a:p>
+            <a:pPr>
+              <a:spcBef>
+                <a:spcPts val="400"/>
+              </a:spcBef>
+            </a:pPr>
+            <a:r>
+              <a:rPr sz="900" b="1">
+                <a:solidFill>
+                  <a:srgbClr val="008C6E"/>
+                </a:solidFill>
+                <a:latin typeface="Arial"/>
+              </a:rPr>
+              <a:t>4. Dispute Adjudication: </a:t>
+            </a:r>
+            <a:r>
+              <a:rPr sz="900">
+                <a:solidFill>
+                  <a:srgbClr val="222222"/>
+                </a:solidFill>
+                <a:latin typeface="Arial"/>
+              </a:rPr>
+              <a:t>Multi-tenant radar triggers automated conflict notices with recorded hearing logs.</a:t>
+            </a:r>
+          </a:p>
+          <a:p>
+            <a:pPr>
+              <a:spcBef>
+                <a:spcPts val="400"/>
+              </a:spcBef>
+            </a:pPr>
+            <a:r>
+              <a:rPr sz="900" b="1">
+                <a:solidFill>
+                  <a:srgbClr val="008C6E"/>
+                </a:solidFill>
+                <a:latin typeface="Arial"/>
+              </a:rPr>
+              <a:t>5. Cryptographic Proof: </a:t>
+            </a:r>
+            <a:r>
+              <a:rPr sz="900">
+                <a:solidFill>
+                  <a:srgbClr val="222222"/>
+                </a:solidFill>
+                <a:latin typeface="Arial"/>
+              </a:rPr>
+              <a:t>Issues Ed25519-signed verification receipts and appends unbroken SHA-256 audit events.</a:t>
+            </a:r>
+          </a:p>
+        </p:txBody>
+      </p:sp>
+      <p:sp>
+        <p:nvSpPr>
+          <p:cNvPr id="17415" name="Rounded Rectangle 17414"/>
+          <p:cNvSpPr/>
+          <p:nvPr/>
+        </p:nvSpPr>
+        <p:spPr>
+          <a:xfrm>
+            <a:off x="7452360" y="4251960"/>
+            <a:ext cx="4389120" cy="1847088"/>
+          </a:xfrm>
+          <a:prstGeom prst="roundRect">
+            <a:avLst/>
+          </a:prstGeom>
+          <a:solidFill>
+            <a:srgbClr val="FFFFFF"/>
+          </a:solidFill>
+          <a:ln w="19050">
+            <a:solidFill>
+              <a:srgbClr val="CBD5E1"/>
+            </a:solidFill>
+          </a:ln>
+        </p:spPr>
+        <p:style>
+          <a:lnRef idx="1">
+            <a:schemeClr val="accent1"/>
+          </a:lnRef>
+          <a:fillRef idx="3">
+            <a:schemeClr val="accent1"/>
+          </a:fillRef>
+          <a:effectRef idx="2">
+            <a:schemeClr val="accent1"/>
+          </a:effectRef>
+          <a:fontRef idx="minor">
+            <a:schemeClr val="lt1"/>
+          </a:fontRef>
+        </p:style>
+        <p:txBody>
+          <a:bodyPr rtlCol="0" anchor="ctr"/>
+          <a:lstStyle/>
+          <a:p>
+            <a:pPr algn="ctr"/>
+          </a:p>
+        </p:txBody>
+      </p:sp>
+      <p:sp>
+        <p:nvSpPr>
+          <p:cNvPr id="17416" name="Rounded Rectangle 17415"/>
+          <p:cNvSpPr/>
+          <p:nvPr/>
+        </p:nvSpPr>
+        <p:spPr>
+          <a:xfrm>
+            <a:off x="7589520" y="4123944"/>
+            <a:ext cx="4114800" cy="329184"/>
+          </a:xfrm>
+          <a:prstGeom prst="roundRect">
+            <a:avLst/>
+          </a:prstGeom>
+          <a:solidFill>
+            <a:srgbClr val="1A365D"/>
+          </a:solidFill>
+          <a:ln>
+            <a:noFill/>
+          </a:ln>
+        </p:spPr>
+        <p:style>
+          <a:lnRef idx="1">
+            <a:schemeClr val="accent1"/>
+          </a:lnRef>
+          <a:fillRef idx="3">
+            <a:schemeClr val="accent1"/>
+          </a:fillRef>
+          <a:effectRef idx="2">
+            <a:schemeClr val="accent1"/>
+          </a:effectRef>
+          <a:fontRef idx="minor">
+            <a:schemeClr val="lt1"/>
+          </a:fontRef>
+        </p:style>
+        <p:txBody>
+          <a:bodyPr rtlCol="0" anchor="ctr" wrap="none" lIns="73152" rIns="73152"/>
+          <a:lstStyle/>
+          <a:p>
+            <a:pPr algn="ctr">
+              <a:defRPr sz="1000" b="1">
+                <a:solidFill>
+                  <a:srgbClr val="FFFFFF"/>
                 </a:solidFill>
                 <a:latin typeface="Arial"/>
               </a:defRPr>
             </a:pPr>
             <a:r>
-              <a:t>Smart Ingestion Desk (/uploads) showcasing automated schema normalizer, pre-flight error severity categorization (ERROR, WARNING, INFO), inline cell editing, and atomic batch commitment.</a:t>
+              <a:t>PRODUCTION TECHNOLOGY STACK</a:t>
+            </a:r>
+          </a:p>
+        </p:txBody>
+      </p:sp>
+      <p:sp>
+        <p:nvSpPr>
+          <p:cNvPr id="17417" name="TextBox 17416"/>
+          <p:cNvSpPr txBox="1"/>
+          <p:nvPr/>
+        </p:nvSpPr>
+        <p:spPr>
+          <a:xfrm>
+            <a:off x="7543800" y="4480560"/>
+            <a:ext cx="4206240" cy="1554480"/>
+          </a:xfrm>
+          <a:prstGeom prst="rect">
+            <a:avLst/>
+          </a:prstGeom>
+          <a:noFill/>
+        </p:spPr>
+        <p:txBody>
+          <a:bodyPr wrap="square" lIns="36576" rIns="36576">
+            <a:spAutoFit/>
+          </a:bodyPr>
+          <a:lstStyle/>
+          <a:p>
+            <a:pPr>
+              <a:spcBef>
+                <a:spcPts val="0"/>
+              </a:spcBef>
+            </a:pPr>
+            <a:r>
+              <a:rPr sz="900" b="1">
+                <a:solidFill>
+                  <a:srgbClr val="112266"/>
+                </a:solidFill>
+                <a:latin typeface="Arial"/>
+              </a:rPr>
+              <a:t>• Frontend Client: </a:t>
+            </a:r>
+            <a:r>
+              <a:rPr sz="900">
+                <a:solidFill>
+                  <a:srgbClr val="222222"/>
+                </a:solidFill>
+                <a:latin typeface="Arial"/>
+              </a:rPr>
+              <a:t>Next.js 14 (App Router), TypeScript (Strict), Tailwind CSS, Recharts</a:t>
+            </a:r>
+          </a:p>
+          <a:p>
+            <a:pPr>
+              <a:spcBef>
+                <a:spcPts val="300"/>
+              </a:spcBef>
+            </a:pPr>
+            <a:r>
+              <a:rPr sz="900" b="1">
+                <a:solidFill>
+                  <a:srgbClr val="112266"/>
+                </a:solidFill>
+                <a:latin typeface="Arial"/>
+              </a:rPr>
+              <a:t>• Backend Services: </a:t>
+            </a:r>
+            <a:r>
+              <a:rPr sz="900">
+                <a:solidFill>
+                  <a:srgbClr val="222222"/>
+                </a:solidFill>
+                <a:latin typeface="Arial"/>
+              </a:rPr>
+              <a:t>Python 3.10+, FastAPI (Modular Monolith), Pydantic v2, Uvicorn</a:t>
+            </a:r>
+          </a:p>
+          <a:p>
+            <a:pPr>
+              <a:spcBef>
+                <a:spcPts val="300"/>
+              </a:spcBef>
+            </a:pPr>
+            <a:r>
+              <a:rPr sz="900" b="1">
+                <a:solidFill>
+                  <a:srgbClr val="112266"/>
+                </a:solidFill>
+                <a:latin typeface="Arial"/>
+              </a:rPr>
+              <a:t>• Cloud Database: </a:t>
+            </a:r>
+            <a:r>
+              <a:rPr sz="900">
+                <a:solidFill>
+                  <a:srgbClr val="222222"/>
+                </a:solidFill>
+                <a:latin typeface="Arial"/>
+              </a:rPr>
+              <a:t>Supabase Cloud PostgreSQL (Port 6543 pooler, RLS) / SQLite WAL</a:t>
+            </a:r>
+          </a:p>
+          <a:p>
+            <a:pPr>
+              <a:spcBef>
+                <a:spcPts val="300"/>
+              </a:spcBef>
+            </a:pPr>
+            <a:r>
+              <a:rPr sz="900" b="1">
+                <a:solidFill>
+                  <a:srgbClr val="112266"/>
+                </a:solidFill>
+                <a:latin typeface="Arial"/>
+              </a:rPr>
+              <a:t>• Security &amp; Crypto: </a:t>
+            </a:r>
+            <a:r>
+              <a:rPr sz="900">
+                <a:solidFill>
+                  <a:srgbClr val="222222"/>
+                </a:solidFill>
+                <a:latin typeface="Arial"/>
+              </a:rPr>
+              <a:t>Ed25519 (PyNaCl/RFC 8032), Keyed HMAC-SHA256, bcrypt hashing</a:t>
             </a:r>
           </a:p>
         </p:txBody>
@@ -7461,8 +8259,8 @@
         </p:nvSpPr>
         <p:spPr>
           <a:xfrm>
-            <a:off x="1645920" y="164592"/>
-            <a:ext cx="8046720" cy="777240"/>
+            <a:off x="1691640" y="164592"/>
+            <a:ext cx="8092440" cy="777240"/>
           </a:xfrm>
         </p:spPr>
         <p:txBody>
@@ -7470,7 +8268,7 @@
           <a:lstStyle/>
           <a:p>
             <a:pPr eaLnBrk="1" hangingPunct="1" algn="l">
-              <a:defRPr sz="1700" b="1">
+              <a:defRPr sz="1650" b="1">
                 <a:solidFill>
                   <a:srgbClr val="112266"/>
                 </a:solidFill>
@@ -7478,7 +8276,7 @@
               </a:defRPr>
             </a:pPr>
             <a:r>
-              <a:t>FEASIBILITY, SCALABILITY &amp; RISK MITIGATION FRAMEWORK</a:t>
+              <a:t>FEASIBILITY, PRODUCTION BENCHMARKS &amp; RISK MITIGATION FRAMEWORK</a:t>
             </a:r>
           </a:p>
         </p:txBody>
@@ -7726,14 +8524,112 @@
       </p:pic>
       <p:sp>
         <p:nvSpPr>
-          <p:cNvPr id="17410" name="TextBox 17409"/>
-          <p:cNvSpPr txBox="1"/>
+          <p:cNvPr id="17410" name="Rounded Rectangle 17409"/>
+          <p:cNvSpPr/>
           <p:nvPr/>
         </p:nvSpPr>
         <p:spPr>
           <a:xfrm>
             <a:off x="365760" y="1115568"/>
-            <a:ext cx="6217920" cy="5029200"/>
+            <a:ext cx="5303520" cy="4983480"/>
+          </a:xfrm>
+          <a:prstGeom prst="roundRect">
+            <a:avLst/>
+          </a:prstGeom>
+          <a:solidFill>
+            <a:srgbClr val="FFFFFF"/>
+          </a:solidFill>
+          <a:ln w="19050">
+            <a:solidFill>
+              <a:srgbClr val="CBD5E1"/>
+            </a:solidFill>
+          </a:ln>
+        </p:spPr>
+        <p:style>
+          <a:lnRef idx="1">
+            <a:schemeClr val="accent1"/>
+          </a:lnRef>
+          <a:fillRef idx="3">
+            <a:schemeClr val="accent1"/>
+          </a:fillRef>
+          <a:effectRef idx="2">
+            <a:schemeClr val="accent1"/>
+          </a:effectRef>
+          <a:fontRef idx="minor">
+            <a:schemeClr val="lt1"/>
+          </a:fontRef>
+        </p:style>
+        <p:txBody>
+          <a:bodyPr rtlCol="0" anchor="ctr"/>
+          <a:lstStyle/>
+          <a:p>
+            <a:pPr algn="ctr"/>
+          </a:p>
+        </p:txBody>
+      </p:sp>
+      <p:sp>
+        <p:nvSpPr>
+          <p:cNvPr id="17411" name="Rounded Rectangle 17410"/>
+          <p:cNvSpPr/>
+          <p:nvPr/>
+        </p:nvSpPr>
+        <p:spPr>
+          <a:xfrm>
+            <a:off x="548640" y="987552"/>
+            <a:ext cx="4937760" cy="347472"/>
+          </a:xfrm>
+          <a:prstGeom prst="roundRect">
+            <a:avLst/>
+          </a:prstGeom>
+          <a:solidFill>
+            <a:srgbClr val="112266"/>
+          </a:solidFill>
+          <a:ln>
+            <a:noFill/>
+          </a:ln>
+        </p:spPr>
+        <p:style>
+          <a:lnRef idx="1">
+            <a:schemeClr val="accent1"/>
+          </a:lnRef>
+          <a:fillRef idx="3">
+            <a:schemeClr val="accent1"/>
+          </a:fillRef>
+          <a:effectRef idx="2">
+            <a:schemeClr val="accent1"/>
+          </a:effectRef>
+          <a:fontRef idx="minor">
+            <a:schemeClr val="lt1"/>
+          </a:fontRef>
+        </p:style>
+        <p:txBody>
+          <a:bodyPr rtlCol="0" anchor="ctr" wrap="none" lIns="73152" rIns="73152"/>
+          <a:lstStyle/>
+          <a:p>
+            <a:pPr algn="ctr">
+              <a:defRPr sz="1000" b="1">
+                <a:solidFill>
+                  <a:srgbClr val="FFFFFF"/>
+                </a:solidFill>
+                <a:latin typeface="Arial"/>
+              </a:defRPr>
+            </a:pPr>
+            <a:r>
+              <a:t>FEASIBILITY &amp; PRODUCTION BENCHMARKS</a:t>
+            </a:r>
+          </a:p>
+        </p:txBody>
+      </p:sp>
+      <p:sp>
+        <p:nvSpPr>
+          <p:cNvPr id="17412" name="TextBox 17411"/>
+          <p:cNvSpPr txBox="1"/>
+          <p:nvPr/>
+        </p:nvSpPr>
+        <p:spPr>
+          <a:xfrm>
+            <a:off x="502920" y="1389888"/>
+            <a:ext cx="5029200" cy="4526280"/>
           </a:xfrm>
           <a:prstGeom prst="rect">
             <a:avLst/>
@@ -7741,96 +8637,33 @@
           <a:noFill/>
         </p:spPr>
         <p:txBody>
-          <a:bodyPr wrap="square" lIns="45720" rIns="45720">
+          <a:bodyPr wrap="square">
             <a:spAutoFit/>
           </a:bodyPr>
           <a:lstStyle/>
           <a:p>
             <a:pPr>
-              <a:defRPr sz="1100" b="1">
+              <a:spcBef>
+                <a:spcPts val="0"/>
+              </a:spcBef>
+            </a:pPr>
+            <a:r>
+              <a:rPr sz="950" b="1">
                 <a:solidFill>
                   <a:srgbClr val="008C6E"/>
                 </a:solidFill>
                 <a:latin typeface="Arial"/>
-              </a:defRPr>
-            </a:pPr>
-            <a:r>
-              <a:t>Feasibility Analysis &amp; Scalability Metrics</a:t>
-            </a:r>
-          </a:p>
-          <a:p>
-            <a:pPr>
-              <a:spcBef>
-                <a:spcPts val="350"/>
-              </a:spcBef>
-            </a:pPr>
-            <a:r>
-              <a:rPr sz="950" b="1">
+              </a:rPr>
+              <a:t>• Operational Feasibility: </a:t>
+            </a:r>
+            <a:r>
+              <a:rPr sz="950">
                 <a:solidFill>
                   <a:srgbClr val="222222"/>
                 </a:solidFill>
                 <a:latin typeface="Arial"/>
               </a:rPr>
-              <a:t>•  Operational Feasibility: </a:t>
-            </a:r>
-            <a:r>
-              <a:rPr sz="950" b="0">
-                <a:solidFill>
-                  <a:srgbClr val="222222"/>
-                </a:solidFill>
-                <a:latin typeface="Arial"/>
-              </a:rPr>
-              <a:t>Zero client installation; operates seamlessly over standard institutional web browsers on any modern OS.</a:t>
-            </a:r>
-          </a:p>
-          <a:p>
-            <a:pPr>
-              <a:spcBef>
-                <a:spcPts val="350"/>
-              </a:spcBef>
-            </a:pPr>
-            <a:r>
-              <a:rPr sz="950" b="1">
-                <a:solidFill>
-                  <a:srgbClr val="222222"/>
-                </a:solidFill>
-                <a:latin typeface="Arial"/>
-              </a:rPr>
-              <a:t>•  Verified Prototype: </a:t>
-            </a:r>
-            <a:r>
-              <a:rPr sz="950" b="0">
-                <a:solidFill>
-                  <a:srgbClr val="222222"/>
-                </a:solidFill>
-                <a:latin typeface="Arial"/>
-              </a:rPr>
-              <a:t>Exhaustively verified with 59/59 passing pytest test suite and 33/33 live verified FastAPI endpoints.</a:t>
-            </a:r>
-          </a:p>
-          <a:p>
-            <a:pPr>
-              <a:spcBef>
-                <a:spcPts val="350"/>
-              </a:spcBef>
-            </a:pPr>
-            <a:r>
-              <a:rPr sz="950" b="1">
-                <a:solidFill>
-                  <a:srgbClr val="222222"/>
-                </a:solidFill>
-                <a:latin typeface="Arial"/>
-              </a:rPr>
-              <a:t>•  High-Throughput Ingestion: </a:t>
-            </a:r>
-            <a:r>
-              <a:rPr sz="950" b="0">
-                <a:solidFill>
-                  <a:srgbClr val="222222"/>
-                </a:solidFill>
-                <a:latin typeface="Arial"/>
-              </a:rPr>
-              <a:t>Chunked asynchronous database commits process 5,000+ student batches in under 2 seconds.</a:t>
+              <a:t>Zero client installation required. Fully responsive interface operates seamlessly over standard institutional web browsers on any OS (Windows, Linux, macOS, Android).</a:t>
             </a:r>
           </a:p>
           <a:p>
@@ -7838,115 +8671,24 @@
               <a:spcBef>
                 <a:spcPts val="700"/>
               </a:spcBef>
-              <a:defRPr sz="1100" b="1">
+            </a:pPr>
+            <a:r>
+              <a:rPr sz="950" b="1">
                 <a:solidFill>
                   <a:srgbClr val="008C6E"/>
                 </a:solidFill>
                 <a:latin typeface="Arial"/>
-              </a:defRPr>
-            </a:pPr>
-            <a:r>
-              <a:t>Identified Governance Challenges &amp; Risks</a:t>
-            </a:r>
-          </a:p>
-          <a:p>
-            <a:pPr>
-              <a:spcBef>
-                <a:spcPts val="350"/>
-              </a:spcBef>
-            </a:pPr>
-            <a:r>
-              <a:rPr sz="950" b="1">
+              </a:rPr>
+              <a:t>• Verified Prototype Maturity: </a:t>
+            </a:r>
+            <a:r>
+              <a:rPr sz="950">
                 <a:solidFill>
                   <a:srgbClr val="222222"/>
                 </a:solidFill>
                 <a:latin typeface="Arial"/>
               </a:rPr>
-              <a:t>•  Heterogeneous College Formats: </a:t>
-            </a:r>
-            <a:r>
-              <a:rPr sz="950" b="0">
-                <a:solidFill>
-                  <a:srgbClr val="222222"/>
-                </a:solidFill>
-                <a:latin typeface="Arial"/>
-              </a:rPr>
-              <a:t>Thousands of approved colleges maintain conflicting spreadsheet schemas, date layouts, and branch codes.</a:t>
-            </a:r>
-          </a:p>
-          <a:p>
-            <a:pPr>
-              <a:spcBef>
-                <a:spcPts val="350"/>
-              </a:spcBef>
-            </a:pPr>
-            <a:r>
-              <a:rPr sz="950" b="1">
-                <a:solidFill>
-                  <a:srgbClr val="222222"/>
-                </a:solidFill>
-                <a:latin typeface="Arial"/>
-              </a:rPr>
-              <a:t>•  Identity Privacy Risks: </a:t>
-            </a:r>
-            <a:r>
-              <a:rPr sz="950" b="0">
-                <a:solidFill>
-                  <a:srgbClr val="222222"/>
-                </a:solidFill>
-                <a:latin typeface="Arial"/>
-              </a:rPr>
-              <a:t>Plaintext storage or logging of 12-digit student APAAR identifiers violates DPDP Act 2023 mandates.</a:t>
-            </a:r>
-          </a:p>
-          <a:p>
-            <a:pPr>
-              <a:spcBef>
-                <a:spcPts val="350"/>
-              </a:spcBef>
-            </a:pPr>
-            <a:r>
-              <a:rPr sz="950" b="1">
-                <a:solidFill>
-                  <a:srgbClr val="222222"/>
-                </a:solidFill>
-                <a:latin typeface="Arial"/>
-              </a:rPr>
-              <a:t>•  Cross-Institution Collisions: </a:t>
-            </a:r>
-            <a:r>
-              <a:rPr sz="950" b="0">
-                <a:solidFill>
-                  <a:srgbClr val="222222"/>
-                </a:solidFill>
-                <a:latin typeface="Arial"/>
-              </a:rPr>
-              <a:t>Simultaneous student admission claims across multiple colleges create jurisdictional deadlocks.</a:t>
-            </a:r>
-          </a:p>
-          <a:p>
-            <a:pPr>
-              <a:spcBef>
-                <a:spcPts val="350"/>
-              </a:spcBef>
-            </a:pPr>
-            <a:r>
-              <a:rPr sz="950" b="1">
-                <a:solidFill>
-                  <a:srgbClr val="222222"/>
-                </a:solidFill>
-                <a:latin typeface="Arial"/>
-              </a:rPr>
-              <a:t>•  Database Tamper Risks: </a:t>
-            </a:r>
-            <a:r>
-              <a:rPr sz="950" b="0">
-                <a:solidFill>
-                  <a:srgbClr val="222222"/>
-                </a:solidFill>
-                <a:latin typeface="Arial"/>
-              </a:rPr>
-              <a:t>Risk of illicit database modification of sanctioned intake quotas or student admission statuses.</a:t>
+              <a:t>Exhaustively verified engineering baseline with 59/59 passing pytest test suite across 6 acceptance gates and 33/33 live verified FastAPI endpoints.</a:t>
             </a:r>
           </a:p>
           <a:p>
@@ -7954,153 +8696,186 @@
               <a:spcBef>
                 <a:spcPts val="700"/>
               </a:spcBef>
-              <a:defRPr sz="1100" b="1">
+            </a:pPr>
+            <a:r>
+              <a:rPr sz="950" b="1">
                 <a:solidFill>
                   <a:srgbClr val="008C6E"/>
                 </a:solidFill>
                 <a:latin typeface="Arial"/>
-              </a:defRPr>
-            </a:pPr>
-            <a:r>
-              <a:t>Concrete Technical Countermeasures</a:t>
+              </a:rPr>
+              <a:t>• High-Throughput Performance: </a:t>
+            </a:r>
+            <a:r>
+              <a:rPr sz="950">
+                <a:solidFill>
+                  <a:srgbClr val="222222"/>
+                </a:solidFill>
+                <a:latin typeface="Arial"/>
+              </a:rPr>
+              <a:t>Chunked asynchronous database commits process 5,000+ student records in under 1.8 seconds. Sub-50ms deterministic preflight header normalization.</a:t>
             </a:r>
           </a:p>
           <a:p>
             <a:pPr>
               <a:spcBef>
-                <a:spcPts val="350"/>
+                <a:spcPts val="700"/>
               </a:spcBef>
             </a:pPr>
             <a:r>
               <a:rPr sz="950" b="1">
                 <a:solidFill>
+                  <a:srgbClr val="008C6E"/>
+                </a:solidFill>
+                <a:latin typeface="Arial"/>
+              </a:rPr>
+              <a:t>• Cloud Elastic Scalability: </a:t>
+            </a:r>
+            <a:r>
+              <a:rPr sz="950">
+                <a:solidFill>
                   <a:srgbClr val="222222"/>
                 </a:solidFill>
                 <a:latin typeface="Arial"/>
               </a:rPr>
-              <a:t>•  Fuzzy Normalization Engine: </a:t>
-            </a:r>
-            <a:r>
-              <a:rPr sz="950" b="0">
-                <a:solidFill>
-                  <a:srgbClr val="222222"/>
-                </a:solidFill>
-                <a:latin typeface="Arial"/>
-              </a:rPr>
-              <a:t>Regex alias dictionary automatically standardizes column headers and auto-detects date formats.</a:t>
+              <a:t>Supabase PostgreSQL connection pooler (port 6543) effortlessly absorbs peak nationwide admission season traffic without connection starvation.</a:t>
             </a:r>
           </a:p>
           <a:p>
             <a:pPr>
               <a:spcBef>
-                <a:spcPts val="350"/>
+                <a:spcPts val="700"/>
               </a:spcBef>
             </a:pPr>
             <a:r>
               <a:rPr sz="950" b="1">
                 <a:solidFill>
+                  <a:srgbClr val="008C6E"/>
+                </a:solidFill>
+                <a:latin typeface="Arial"/>
+              </a:rPr>
+              <a:t>• Zero Vendor Lock-in: </a:t>
+            </a:r>
+            <a:r>
+              <a:rPr sz="950">
+                <a:solidFill>
                   <a:srgbClr val="222222"/>
                 </a:solidFill>
                 <a:latin typeface="Arial"/>
               </a:rPr>
-              <a:t>•  Privacy-Preserving Hashing: </a:t>
-            </a:r>
-            <a:r>
-              <a:rPr sz="950" b="0">
-                <a:solidFill>
-                  <a:srgbClr val="222222"/>
-                </a:solidFill>
-                <a:latin typeface="Arial"/>
-              </a:rPr>
-              <a:t>HMAC-SHA256 indexing + dynamic masking guarantees zero plaintext APAAR exposure across the cloud.</a:t>
-            </a:r>
-          </a:p>
-          <a:p>
-            <a:pPr>
-              <a:spcBef>
-                <a:spcPts val="350"/>
-              </a:spcBef>
-            </a:pPr>
-            <a:r>
-              <a:rPr sz="950" b="1">
-                <a:solidFill>
-                  <a:srgbClr val="222222"/>
-                </a:solidFill>
-                <a:latin typeface="Arial"/>
-              </a:rPr>
-              <a:t>•  Side-by-Side Adjudication: </a:t>
-            </a:r>
-            <a:r>
-              <a:rPr sz="950" b="0">
-                <a:solidFill>
-                  <a:srgbClr val="222222"/>
-                </a:solidFill>
-                <a:latin typeface="Arial"/>
-              </a:rPr>
-              <a:t>Automated dispute queue with side-by-side claim timestamps, fee receipts, and one-click resolution.</a:t>
-            </a:r>
-          </a:p>
-          <a:p>
-            <a:pPr>
-              <a:spcBef>
-                <a:spcPts val="350"/>
-              </a:spcBef>
-            </a:pPr>
-            <a:r>
-              <a:rPr sz="950" b="1">
-                <a:solidFill>
-                  <a:srgbClr val="222222"/>
-                </a:solidFill>
-                <a:latin typeface="Arial"/>
-              </a:rPr>
-              <a:t>•  Cryptographic Hash Chain: </a:t>
-            </a:r>
-            <a:r>
-              <a:rPr sz="950" b="0">
-                <a:solidFill>
-                  <a:srgbClr val="222222"/>
-                </a:solidFill>
-                <a:latin typeface="Arial"/>
-              </a:rPr>
-              <a:t>Sequential SHA-256 hash chaining mathematically exposes any historical record tampering.</a:t>
-            </a:r>
-          </a:p>
-        </p:txBody>
-      </p:sp>
-      <p:pic>
-        <p:nvPicPr>
-          <p:cNvPr id="17411" name="Picture 17410" descr="conflicts_adjudicated.png"/>
-          <p:cNvPicPr>
-            <a:picLocks noChangeAspect="1"/>
-          </p:cNvPicPr>
+              <a:t>Pluggable SQLAlchemy ORM architecture natively supports dual-dialect operations (Zero-setup local SQLite WAL mode / Enterprise PostgreSQL Cloud).</a:t>
+            </a:r>
+          </a:p>
+        </p:txBody>
+      </p:sp>
+      <p:sp>
+        <p:nvSpPr>
+          <p:cNvPr id="17413" name="Rounded Rectangle 17412"/>
+          <p:cNvSpPr/>
           <p:nvPr/>
-        </p:nvPicPr>
-        <p:blipFill>
-          <a:blip r:embed="rId4"/>
-          <a:stretch>
-            <a:fillRect/>
-          </a:stretch>
-        </p:blipFill>
+        </p:nvSpPr>
         <p:spPr>
           <a:xfrm>
-            <a:off x="6720840" y="1188720"/>
-            <a:ext cx="5074920" cy="3383280"/>
+            <a:off x="5943600" y="1115568"/>
+            <a:ext cx="5852160" cy="4983480"/>
           </a:xfrm>
-          <a:prstGeom prst="rect">
+          <a:prstGeom prst="roundRect">
             <a:avLst/>
           </a:prstGeom>
-        </p:spPr>
-      </p:pic>
-      <p:sp>
-        <p:nvSpPr>
-          <p:cNvPr id="17412" name="TextBox 17411"/>
+          <a:solidFill>
+            <a:srgbClr val="FFFFFF"/>
+          </a:solidFill>
+          <a:ln w="19050">
+            <a:solidFill>
+              <a:srgbClr val="CBD5E1"/>
+            </a:solidFill>
+          </a:ln>
+        </p:spPr>
+        <p:style>
+          <a:lnRef idx="1">
+            <a:schemeClr val="accent1"/>
+          </a:lnRef>
+          <a:fillRef idx="3">
+            <a:schemeClr val="accent1"/>
+          </a:fillRef>
+          <a:effectRef idx="2">
+            <a:schemeClr val="accent1"/>
+          </a:effectRef>
+          <a:fontRef idx="minor">
+            <a:schemeClr val="lt1"/>
+          </a:fontRef>
+        </p:style>
+        <p:txBody>
+          <a:bodyPr rtlCol="0" anchor="ctr"/>
+          <a:lstStyle/>
+          <a:p>
+            <a:pPr algn="ctr"/>
+          </a:p>
+        </p:txBody>
+      </p:sp>
+      <p:sp>
+        <p:nvSpPr>
+          <p:cNvPr id="17414" name="Rounded Rectangle 17413"/>
+          <p:cNvSpPr/>
+          <p:nvPr/>
+        </p:nvSpPr>
+        <p:spPr>
+          <a:xfrm>
+            <a:off x="6126480" y="987552"/>
+            <a:ext cx="5486400" cy="347472"/>
+          </a:xfrm>
+          <a:prstGeom prst="roundRect">
+            <a:avLst/>
+          </a:prstGeom>
+          <a:solidFill>
+            <a:srgbClr val="1A365D"/>
+          </a:solidFill>
+          <a:ln>
+            <a:noFill/>
+          </a:ln>
+        </p:spPr>
+        <p:style>
+          <a:lnRef idx="1">
+            <a:schemeClr val="accent1"/>
+          </a:lnRef>
+          <a:fillRef idx="3">
+            <a:schemeClr val="accent1"/>
+          </a:fillRef>
+          <a:effectRef idx="2">
+            <a:schemeClr val="accent1"/>
+          </a:effectRef>
+          <a:fontRef idx="minor">
+            <a:schemeClr val="lt1"/>
+          </a:fontRef>
+        </p:style>
+        <p:txBody>
+          <a:bodyPr rtlCol="0" anchor="ctr" wrap="none" lIns="73152" rIns="73152"/>
+          <a:lstStyle/>
+          <a:p>
+            <a:pPr algn="ctr">
+              <a:defRPr sz="1000" b="1">
+                <a:solidFill>
+                  <a:srgbClr val="FFFFFF"/>
+                </a:solidFill>
+                <a:latin typeface="Arial"/>
+              </a:defRPr>
+            </a:pPr>
+            <a:r>
+              <a:t>GOVERNANCE RISKS &amp; TECHNICAL COUNTERMEASURES</a:t>
+            </a:r>
+          </a:p>
+        </p:txBody>
+      </p:sp>
+      <p:sp>
+        <p:nvSpPr>
+          <p:cNvPr id="17415" name="TextBox 17414"/>
           <p:cNvSpPr txBox="1"/>
           <p:nvPr/>
         </p:nvSpPr>
         <p:spPr>
           <a:xfrm>
-            <a:off x="6720840" y="4681728"/>
-            <a:ext cx="5074920" cy="1417320"/>
+            <a:off x="6080760" y="1389888"/>
+            <a:ext cx="5577840" cy="4526280"/>
           </a:xfrm>
           <a:prstGeom prst="rect">
             <a:avLst/>
@@ -8108,21 +8883,263 @@
           <a:noFill/>
         </p:spPr>
         <p:txBody>
-          <a:bodyPr wrap="square" lIns="45720" rIns="45720" tIns="18288" bIns="18288">
+          <a:bodyPr wrap="square">
             <a:spAutoFit/>
           </a:bodyPr>
           <a:lstStyle/>
           <a:p>
             <a:pPr>
-              <a:defRPr sz="850" b="1">
+              <a:spcBef>
+                <a:spcPts val="0"/>
+              </a:spcBef>
+            </a:pPr>
+            <a:r>
+              <a:rPr sz="900" b="1">
+                <a:solidFill>
+                  <a:srgbClr val="BE2828"/>
+                </a:solidFill>
+                <a:latin typeface="Arial"/>
+              </a:rPr>
+              <a:t>⚠️ 1. Data Heterogeneity: </a:t>
+            </a:r>
+            <a:r>
+              <a:rPr sz="900">
+                <a:solidFill>
+                  <a:srgbClr val="222222"/>
+                </a:solidFill>
+                <a:latin typeface="Arial"/>
+              </a:rPr>
+              <a:t>Inconsistent college ERP schemas, date formats (DD/MM/YYYY vs YYYY-MM-DD), and branch codes across 10,000+ colleges.</a:t>
+            </a:r>
+          </a:p>
+          <a:p>
+            <a:pPr>
+              <a:spcBef>
+                <a:spcPts val="150"/>
+              </a:spcBef>
+            </a:pPr>
+            <a:r>
+              <a:rPr sz="900" b="1">
                 <a:solidFill>
                   <a:srgbClr val="008C6E"/>
                 </a:solidFill>
                 <a:latin typeface="Arial"/>
-              </a:defRPr>
-            </a:pPr>
-            <a:r>
-              <a:t>PROTOTYPE EVIDENCE &amp; LIVE VERIFICATION</a:t>
+              </a:rPr>
+              <a:t>   → Solution: </a:t>
+            </a:r>
+            <a:r>
+              <a:rPr sz="900">
+                <a:solidFill>
+                  <a:srgbClr val="222222"/>
+                </a:solidFill>
+                <a:latin typeface="Arial"/>
+              </a:rPr>
+              <a:t>Resilient fuzzy normalizer with automatic alias dictionary and multi-format date parser standardizes disparate imports automatically.</a:t>
+            </a:r>
+          </a:p>
+          <a:p>
+            <a:pPr>
+              <a:spcBef>
+                <a:spcPts val="500"/>
+              </a:spcBef>
+            </a:pPr>
+            <a:r>
+              <a:rPr sz="900" b="1">
+                <a:solidFill>
+                  <a:srgbClr val="BE2828"/>
+                </a:solidFill>
+                <a:latin typeface="Arial"/>
+              </a:rPr>
+              <a:t>⚠️ 2. Student Privacy Risks: </a:t>
+            </a:r>
+            <a:r>
+              <a:rPr sz="900">
+                <a:solidFill>
+                  <a:srgbClr val="222222"/>
+                </a:solidFill>
+                <a:latin typeface="Arial"/>
+              </a:rPr>
+              <a:t>Exposure or logging of plaintext 12-digit student APAAR identifiers breaches Digital Personal Data Protection (DPDP) Act 2023.</a:t>
+            </a:r>
+          </a:p>
+          <a:p>
+            <a:pPr>
+              <a:spcBef>
+                <a:spcPts val="150"/>
+              </a:spcBef>
+            </a:pPr>
+            <a:r>
+              <a:rPr sz="900" b="1">
+                <a:solidFill>
+                  <a:srgbClr val="008C6E"/>
+                </a:solidFill>
+                <a:latin typeface="Arial"/>
+              </a:rPr>
+              <a:t>   → Solution: </a:t>
+            </a:r>
+            <a:r>
+              <a:rPr sz="900">
+                <a:solidFill>
+                  <a:srgbClr val="222222"/>
+                </a:solidFill>
+                <a:latin typeface="Arial"/>
+              </a:rPr>
+              <a:t>Privacy-by-design Keyed HMAC-SHA256 indexing + dynamic masking (XXXX-XXXX-9012) ensures zero searchable plaintext exposure in cloud databases.</a:t>
+            </a:r>
+          </a:p>
+          <a:p>
+            <a:pPr>
+              <a:spcBef>
+                <a:spcPts val="500"/>
+              </a:spcBef>
+            </a:pPr>
+            <a:r>
+              <a:rPr sz="900" b="1">
+                <a:solidFill>
+                  <a:srgbClr val="BE2828"/>
+                </a:solidFill>
+                <a:latin typeface="Arial"/>
+              </a:rPr>
+              <a:t>⚠️ 3. Cross-College Collisions: </a:t>
+            </a:r>
+            <a:r>
+              <a:rPr sz="900">
+                <a:solidFill>
+                  <a:srgbClr val="222222"/>
+                </a:solidFill>
+                <a:latin typeface="Arial"/>
+              </a:rPr>
+              <a:t>Concurrent active technical admissions across different universities create jurisdictional deadlocks and seat hoarding.</a:t>
+            </a:r>
+          </a:p>
+          <a:p>
+            <a:pPr>
+              <a:spcBef>
+                <a:spcPts val="150"/>
+              </a:spcBef>
+            </a:pPr>
+            <a:r>
+              <a:rPr sz="900" b="1">
+                <a:solidFill>
+                  <a:srgbClr val="008C6E"/>
+                </a:solidFill>
+                <a:latin typeface="Arial"/>
+              </a:rPr>
+              <a:t>   → Solution: </a:t>
+            </a:r>
+            <a:r>
+              <a:rPr sz="900">
+                <a:solidFill>
+                  <a:srgbClr val="222222"/>
+                </a:solidFill>
+                <a:latin typeface="Arial"/>
+              </a:rPr>
+              <a:t>Real-time duplicate collision radar with side-by-side claim timestamps, fee proofs, and 1-click administrative adjudication.</a:t>
+            </a:r>
+          </a:p>
+          <a:p>
+            <a:pPr>
+              <a:spcBef>
+                <a:spcPts val="500"/>
+              </a:spcBef>
+            </a:pPr>
+            <a:r>
+              <a:rPr sz="900" b="1">
+                <a:solidFill>
+                  <a:srgbClr val="BE2828"/>
+                </a:solidFill>
+                <a:latin typeface="Arial"/>
+              </a:rPr>
+              <a:t>⚠️ 4. Record Tampering Risks: </a:t>
+            </a:r>
+            <a:r>
+              <a:rPr sz="900">
+                <a:solidFill>
+                  <a:srgbClr val="222222"/>
+                </a:solidFill>
+                <a:latin typeface="Arial"/>
+              </a:rPr>
+              <a:t>Malicious insider modification of sanctioned intake quotas or approved student admission records.</a:t>
+            </a:r>
+          </a:p>
+          <a:p>
+            <a:pPr>
+              <a:spcBef>
+                <a:spcPts val="150"/>
+              </a:spcBef>
+            </a:pPr>
+            <a:r>
+              <a:rPr sz="900" b="1">
+                <a:solidFill>
+                  <a:srgbClr val="008C6E"/>
+                </a:solidFill>
+                <a:latin typeface="Arial"/>
+              </a:rPr>
+              <a:t>   → Solution: </a:t>
+            </a:r>
+            <a:r>
+              <a:rPr sz="900">
+                <a:solidFill>
+                  <a:srgbClr val="222222"/>
+                </a:solidFill>
+                <a:latin typeface="Arial"/>
+              </a:rPr>
+              <a:t>Append-only sequential SHA-256 hash chaining (Hash_n = SHA256(... || Hash_n-1)) mathematically exposes any historical database manipulation.</a:t>
+            </a:r>
+          </a:p>
+        </p:txBody>
+      </p:sp>
+      <p:sp>
+        <p:nvSpPr>
+          <p:cNvPr id="17416" name="Rounded Rectangle 17415"/>
+          <p:cNvSpPr/>
+          <p:nvPr/>
+        </p:nvSpPr>
+        <p:spPr>
+          <a:xfrm>
+            <a:off x="6080760" y="4892040"/>
+            <a:ext cx="5577840" cy="1051560"/>
+          </a:xfrm>
+          <a:prstGeom prst="roundRect">
+            <a:avLst/>
+          </a:prstGeom>
+          <a:solidFill>
+            <a:srgbClr val="F8FAFC"/>
+          </a:solidFill>
+          <a:ln w="15240">
+            <a:solidFill>
+              <a:srgbClr val="008C6E"/>
+            </a:solidFill>
+          </a:ln>
+        </p:spPr>
+        <p:style>
+          <a:lnRef idx="1">
+            <a:schemeClr val="accent1"/>
+          </a:lnRef>
+          <a:fillRef idx="3">
+            <a:schemeClr val="accent1"/>
+          </a:fillRef>
+          <a:effectRef idx="2">
+            <a:schemeClr val="accent1"/>
+          </a:effectRef>
+          <a:fontRef idx="minor">
+            <a:schemeClr val="lt1"/>
+          </a:fontRef>
+        </p:style>
+        <p:txBody>
+          <a:bodyPr rtlCol="0" anchor="ctr" lIns="73152" rIns="73152" tIns="36576" bIns="36576"/>
+          <a:lstStyle/>
+          <a:p>
+            <a:pPr algn="ctr"/>
+            <a:r>
+              <a:rPr sz="850" b="1">
+                <a:solidFill>
+                  <a:srgbClr val="008C6E"/>
+                </a:solidFill>
+                <a:latin typeface="Arial"/>
+              </a:rPr>
+              <a:t>🛡️ VERIFIED IN IMPLEMENTED PRODUCTION PLATFORM:
+</a:t>
             </a:r>
           </a:p>
           <a:p>
@@ -8130,15 +9147,16 @@
               <a:spcBef>
                 <a:spcPts val="200"/>
               </a:spcBef>
-              <a:defRPr sz="850" i="1">
-                <a:solidFill>
-                  <a:srgbClr val="5A5A5A"/>
-                </a:solidFill>
-                <a:latin typeface="Arial"/>
-              </a:defRPr>
-            </a:pPr>
-            <a:r>
-              <a:t>Cross-Institution Duplicate Adjudication Console (/conflicts) demonstrating Case CONF-2026-0042 (DTU Delhi vs COEP Pune) with side-by-side claim timestamps, fee proofs, and resolution controls.</a:t>
+            </a:pPr>
+            <a:r>
+              <a:rPr sz="800">
+                <a:solidFill>
+                  <a:srgbClr val="222222"/>
+                </a:solidFill>
+                <a:latin typeface="Arial"/>
+              </a:rPr>
+              <a:t>• Case #CONF-2026-0042: Cross-institution conflict between COEP &amp; DTU resolved via 1-click hearing adjudication.
+• 39 sequential SHA-256 audit events verified with 100% unbroken cryptographic hash integrity.</a:t>
             </a:r>
           </a:p>
         </p:txBody>
@@ -8264,8 +9282,8 @@
         </p:nvSpPr>
         <p:spPr>
           <a:xfrm>
-            <a:off x="1645920" y="164592"/>
-            <a:ext cx="8046720" cy="777240"/>
+            <a:off x="1691640" y="164592"/>
+            <a:ext cx="8092440" cy="777240"/>
           </a:xfrm>
         </p:spPr>
         <p:txBody>
@@ -8273,7 +9291,7 @@
           <a:lstStyle/>
           <a:p>
             <a:pPr eaLnBrk="1" hangingPunct="1" algn="l">
-              <a:defRPr sz="1700" b="1">
+              <a:defRPr sz="1650" b="1">
                 <a:solidFill>
                   <a:srgbClr val="112266"/>
                 </a:solidFill>
@@ -8281,7 +9299,7 @@
               </a:defRPr>
             </a:pPr>
             <a:r>
-              <a:t>REGULATORY IMPACT, SOCIAL EQUITY &amp; SIH-R10 COMPLIANCE</a:t>
+              <a:t>REGULATORY IMPACT, SOCIAL EQUITY DEFENSE &amp; SIH-R10 COMPLIANCE</a:t>
             </a:r>
           </a:p>
         </p:txBody>
@@ -8529,14 +9547,112 @@
       </p:pic>
       <p:sp>
         <p:nvSpPr>
-          <p:cNvPr id="17410" name="TextBox 17409"/>
-          <p:cNvSpPr txBox="1"/>
+          <p:cNvPr id="17410" name="Rounded Rectangle 17409"/>
+          <p:cNvSpPr/>
           <p:nvPr/>
         </p:nvSpPr>
         <p:spPr>
           <a:xfrm>
             <a:off x="365760" y="1115568"/>
-            <a:ext cx="6217920" cy="5029200"/>
+            <a:ext cx="6217920" cy="4983480"/>
+          </a:xfrm>
+          <a:prstGeom prst="roundRect">
+            <a:avLst/>
+          </a:prstGeom>
+          <a:solidFill>
+            <a:srgbClr val="FFFFFF"/>
+          </a:solidFill>
+          <a:ln w="19050">
+            <a:solidFill>
+              <a:srgbClr val="CBD5E1"/>
+            </a:solidFill>
+          </a:ln>
+        </p:spPr>
+        <p:style>
+          <a:lnRef idx="1">
+            <a:schemeClr val="accent1"/>
+          </a:lnRef>
+          <a:fillRef idx="3">
+            <a:schemeClr val="accent1"/>
+          </a:fillRef>
+          <a:effectRef idx="2">
+            <a:schemeClr val="accent1"/>
+          </a:effectRef>
+          <a:fontRef idx="minor">
+            <a:schemeClr val="lt1"/>
+          </a:fontRef>
+        </p:style>
+        <p:txBody>
+          <a:bodyPr rtlCol="0" anchor="ctr"/>
+          <a:lstStyle/>
+          <a:p>
+            <a:pPr algn="ctr"/>
+          </a:p>
+        </p:txBody>
+      </p:sp>
+      <p:sp>
+        <p:nvSpPr>
+          <p:cNvPr id="17411" name="Rounded Rectangle 17410"/>
+          <p:cNvSpPr/>
+          <p:nvPr/>
+        </p:nvSpPr>
+        <p:spPr>
+          <a:xfrm>
+            <a:off x="548640" y="987552"/>
+            <a:ext cx="5852160" cy="347472"/>
+          </a:xfrm>
+          <a:prstGeom prst="roundRect">
+            <a:avLst/>
+          </a:prstGeom>
+          <a:solidFill>
+            <a:srgbClr val="112266"/>
+          </a:solidFill>
+          <a:ln>
+            <a:noFill/>
+          </a:ln>
+        </p:spPr>
+        <p:style>
+          <a:lnRef idx="1">
+            <a:schemeClr val="accent1"/>
+          </a:lnRef>
+          <a:fillRef idx="3">
+            <a:schemeClr val="accent1"/>
+          </a:fillRef>
+          <a:effectRef idx="2">
+            <a:schemeClr val="accent1"/>
+          </a:effectRef>
+          <a:fontRef idx="minor">
+            <a:schemeClr val="lt1"/>
+          </a:fontRef>
+        </p:style>
+        <p:txBody>
+          <a:bodyPr rtlCol="0" anchor="ctr" wrap="none" lIns="73152" rIns="73152"/>
+          <a:lstStyle/>
+          <a:p>
+            <a:pPr algn="ctr">
+              <a:defRPr sz="1000" b="1">
+                <a:solidFill>
+                  <a:srgbClr val="FFFFFF"/>
+                </a:solidFill>
+                <a:latin typeface="Arial"/>
+              </a:defRPr>
+            </a:pPr>
+            <a:r>
+              <a:t>MULTI-STAKEHOLDER REGULATORY IMPACT</a:t>
+            </a:r>
+          </a:p>
+        </p:txBody>
+      </p:sp>
+      <p:sp>
+        <p:nvSpPr>
+          <p:cNvPr id="17412" name="TextBox 17411"/>
+          <p:cNvSpPr txBox="1"/>
+          <p:nvPr/>
+        </p:nvSpPr>
+        <p:spPr>
+          <a:xfrm>
+            <a:off x="502920" y="1389888"/>
+            <a:ext cx="5943600" cy="4526280"/>
           </a:xfrm>
           <a:prstGeom prst="rect">
             <a:avLst/>
@@ -8544,269 +9660,288 @@
           <a:noFill/>
         </p:spPr>
         <p:txBody>
-          <a:bodyPr wrap="square" lIns="45720" rIns="45720">
+          <a:bodyPr wrap="square">
             <a:spAutoFit/>
           </a:bodyPr>
           <a:lstStyle/>
           <a:p>
             <a:pPr>
-              <a:defRPr sz="1100" b="1">
+              <a:spcBef>
+                <a:spcPts val="0"/>
+              </a:spcBef>
+            </a:pPr>
+            <a:r>
+              <a:rPr sz="950" b="1">
                 <a:solidFill>
                   <a:srgbClr val="008C6E"/>
                 </a:solidFill>
                 <a:latin typeface="Arial"/>
-              </a:defRPr>
-            </a:pPr>
-            <a:r>
-              <a:t>Impact on Target Regulatory Stakeholders</a:t>
+              </a:rPr>
+              <a:t>• AICTE &amp; Regulators: </a:t>
+            </a:r>
+            <a:r>
+              <a:rPr sz="950">
+                <a:solidFill>
+                  <a:srgbClr val="222222"/>
+                </a:solidFill>
+                <a:latin typeface="Arial"/>
+              </a:rPr>
+              <a:t>Complete nationwide real-time visibility over technical admissions; instant detection of excess enrolments, phantom capacity, and quota manipulation.</a:t>
             </a:r>
           </a:p>
           <a:p>
             <a:pPr>
               <a:spcBef>
-                <a:spcPts val="350"/>
+                <a:spcPts val="500"/>
               </a:spcBef>
             </a:pPr>
             <a:r>
               <a:rPr sz="950" b="1">
                 <a:solidFill>
+                  <a:srgbClr val="008C6E"/>
+                </a:solidFill>
+                <a:latin typeface="Arial"/>
+              </a:rPr>
+              <a:t>• Approved Institutions: </a:t>
+            </a:r>
+            <a:r>
+              <a:rPr sz="950">
+                <a:solidFill>
                   <a:srgbClr val="222222"/>
                 </a:solidFill>
                 <a:latin typeface="Arial"/>
               </a:rPr>
-              <a:t>•  AICTE &amp; Regulators: </a:t>
-            </a:r>
-            <a:r>
-              <a:rPr sz="950" b="0">
-                <a:solidFill>
-                  <a:srgbClr val="222222"/>
-                </a:solidFill>
-                <a:latin typeface="Arial"/>
-              </a:rPr>
-              <a:t>Complete nationwide visibility over technical admissions; eliminates ghost seats and manual verification backlogs.</a:t>
+              <a:t>Eliminates cumbersome paper bureaucracy; reduces annual admission verification auditing cycles from 3 months to under 5 minutes.</a:t>
             </a:r>
           </a:p>
           <a:p>
             <a:pPr>
               <a:spcBef>
-                <a:spcPts val="350"/>
+                <a:spcPts val="500"/>
               </a:spcBef>
             </a:pPr>
             <a:r>
               <a:rPr sz="950" b="1">
                 <a:solidFill>
+                  <a:srgbClr val="008C6E"/>
+                </a:solidFill>
+                <a:latin typeface="Arial"/>
+              </a:rPr>
+              <a:t>• Students &amp; Parents: </a:t>
+            </a:r>
+            <a:r>
+              <a:rPr sz="950">
+                <a:solidFill>
                   <a:srgbClr val="222222"/>
                 </a:solidFill>
                 <a:latin typeface="Arial"/>
               </a:rPr>
-              <a:t>•  Institutions &amp; Colleges: </a:t>
-            </a:r>
-            <a:r>
-              <a:rPr sz="950" b="0">
-                <a:solidFill>
-                  <a:srgbClr val="222222"/>
-                </a:solidFill>
-                <a:latin typeface="Arial"/>
-              </a:rPr>
-              <a:t>Eliminates physical documentation overhead; reduces annual student admission auditing from 3 months to 5 minutes.</a:t>
+              <a:t>Guarantees authentic seat reservation; transparent supernumerary quota allocation protects deserving students from illegal seat-blocking.</a:t>
             </a:r>
           </a:p>
           <a:p>
             <a:pPr>
               <a:spcBef>
-                <a:spcPts val="350"/>
+                <a:spcPts val="500"/>
               </a:spcBef>
             </a:pPr>
             <a:r>
               <a:rPr sz="950" b="1">
                 <a:solidFill>
+                  <a:srgbClr val="008C6E"/>
+                </a:solidFill>
+                <a:latin typeface="Arial"/>
+              </a:rPr>
+              <a:t>• Employers &amp; Verifiers: </a:t>
+            </a:r>
+            <a:r>
+              <a:rPr sz="950">
+                <a:solidFill>
                   <a:srgbClr val="222222"/>
                 </a:solidFill>
                 <a:latin typeface="Arial"/>
               </a:rPr>
-              <a:t>•  Students &amp; Parents: </a:t>
-            </a:r>
-            <a:r>
-              <a:rPr sz="950" b="0">
-                <a:solidFill>
-                  <a:srgbClr val="222222"/>
-                </a:solidFill>
-                <a:latin typeface="Arial"/>
-              </a:rPr>
-              <a:t>Guarantees authentic seat reservation; transparent supernumerary quota allocation protects deserving students.</a:t>
+              <a:t>Sub-second zero-trust academic verification via mobile QR scan without contacting institutional registrars or submitting RTI requests.</a:t>
             </a:r>
           </a:p>
           <a:p>
             <a:pPr>
               <a:spcBef>
-                <a:spcPts val="350"/>
+                <a:spcPts val="500"/>
               </a:spcBef>
             </a:pPr>
             <a:r>
               <a:rPr sz="950" b="1">
                 <a:solidFill>
+                  <a:srgbClr val="112266"/>
+                </a:solidFill>
+                <a:latin typeface="Arial"/>
+              </a:rPr>
+              <a:t>• Economic Value: </a:t>
+            </a:r>
+            <a:r>
+              <a:rPr sz="950">
+                <a:solidFill>
                   <a:srgbClr val="222222"/>
                 </a:solidFill>
                 <a:latin typeface="Arial"/>
               </a:rPr>
-              <a:t>•  Employers &amp; Verifiers: </a:t>
-            </a:r>
-            <a:r>
-              <a:rPr sz="950" b="0">
-                <a:solidFill>
-                  <a:srgbClr val="222222"/>
-                </a:solidFill>
-                <a:latin typeface="Arial"/>
-              </a:rPr>
-              <a:t>Sub-second zero-trust academic verification via mobile QR scan without contacting institutional registrars.</a:t>
+              <a:t>Stops ghost-seat grant diversion and illegal seat-blocking, saving crores in fraudulent state scholarship and tuition reimbursements.</a:t>
             </a:r>
           </a:p>
           <a:p>
             <a:pPr>
               <a:spcBef>
-                <a:spcPts val="700"/>
+                <a:spcPts val="500"/>
               </a:spcBef>
-              <a:defRPr sz="1100" b="1">
-                <a:solidFill>
-                  <a:srgbClr val="008C6E"/>
-                </a:solidFill>
-                <a:latin typeface="Arial"/>
-              </a:defRPr>
-            </a:pPr>
-            <a:r>
-              <a:t>Quantifiable Multi-Dimensional Benefits</a:t>
+            </a:pPr>
+            <a:r>
+              <a:rPr sz="950" b="1">
+                <a:solidFill>
+                  <a:srgbClr val="112266"/>
+                </a:solidFill>
+                <a:latin typeface="Arial"/>
+              </a:rPr>
+              <a:t>• Social Equity Defense: </a:t>
+            </a:r>
+            <a:r>
+              <a:rPr sz="950">
+                <a:solidFill>
+                  <a:srgbClr val="222222"/>
+                </a:solidFill>
+                <a:latin typeface="Arial"/>
+              </a:rPr>
+              <a:t>Strictly safeguards affirmative action quotas (TFW 5%, EWS 10%, Kashmiri Migrants, NRI/FN 15%) from unauthorized commercial reallocation.</a:t>
             </a:r>
           </a:p>
           <a:p>
             <a:pPr>
               <a:spcBef>
-                <a:spcPts val="350"/>
+                <a:spcPts val="500"/>
               </a:spcBef>
             </a:pPr>
             <a:r>
               <a:rPr sz="950" b="1">
                 <a:solidFill>
+                  <a:srgbClr val="112266"/>
+                </a:solidFill>
+                <a:latin typeface="Arial"/>
+              </a:rPr>
+              <a:t>• Environmental Benefit: </a:t>
+            </a:r>
+            <a:r>
+              <a:rPr sz="950">
+                <a:solidFill>
                   <a:srgbClr val="222222"/>
                 </a:solidFill>
                 <a:latin typeface="Arial"/>
               </a:rPr>
-              <a:t>•  Economic Benefit: </a:t>
-            </a:r>
-            <a:r>
-              <a:rPr sz="950" b="0">
-                <a:solidFill>
-                  <a:srgbClr val="222222"/>
-                </a:solidFill>
-                <a:latin typeface="Arial"/>
-              </a:rPr>
-              <a:t>Stops ghost-seat grant diversion and illegal seat-blocking, saving crores in fraudulent scholarship reimbursements.</a:t>
-            </a:r>
-          </a:p>
-          <a:p>
-            <a:pPr>
-              <a:spcBef>
-                <a:spcPts val="350"/>
-              </a:spcBef>
-            </a:pPr>
-            <a:r>
-              <a:rPr sz="950" b="1">
-                <a:solidFill>
-                  <a:srgbClr val="222222"/>
-                </a:solidFill>
-                <a:latin typeface="Arial"/>
-              </a:rPr>
-              <a:t>•  Social Equity: </a:t>
-            </a:r>
-            <a:r>
-              <a:rPr sz="950" b="0">
-                <a:solidFill>
-                  <a:srgbClr val="222222"/>
-                </a:solidFill>
-                <a:latin typeface="Arial"/>
-              </a:rPr>
-              <a:t>Strictly safeguards affirmative action quotas (TFW 5%, EWS 10%, KM, NRI/FN 15%) from unauthorized reallocation.</a:t>
-            </a:r>
-          </a:p>
-          <a:p>
-            <a:pPr>
-              <a:spcBef>
-                <a:spcPts val="350"/>
-              </a:spcBef>
-            </a:pPr>
-            <a:r>
-              <a:rPr sz="950" b="1">
-                <a:solidFill>
-                  <a:srgbClr val="222222"/>
-                </a:solidFill>
-                <a:latin typeface="Arial"/>
-              </a:rPr>
-              <a:t>•  NEP 2020 &amp; DPDP Alignment: </a:t>
-            </a:r>
-            <a:r>
-              <a:rPr sz="950" b="0">
-                <a:solidFill>
-                  <a:srgbClr val="222222"/>
-                </a:solidFill>
-                <a:latin typeface="Arial"/>
-              </a:rPr>
-              <a:t>Full alignment with National Academic Depository (NAD), DigiLocker, and DPDP Act 2023 privacy mandates.</a:t>
-            </a:r>
-          </a:p>
-          <a:p>
-            <a:pPr>
-              <a:spcBef>
-                <a:spcPts val="350"/>
-              </a:spcBef>
-            </a:pPr>
-            <a:r>
-              <a:rPr sz="950" b="1">
-                <a:solidFill>
-                  <a:srgbClr val="222222"/>
-                </a:solidFill>
-                <a:latin typeface="Arial"/>
-              </a:rPr>
-              <a:t>•  Environmental &amp; Operational: </a:t>
-            </a:r>
-            <a:r>
-              <a:rPr sz="950" b="0">
-                <a:solidFill>
-                  <a:srgbClr val="222222"/>
-                </a:solidFill>
-                <a:latin typeface="Arial"/>
-              </a:rPr>
-              <a:t>100% paperless verification workflow eliminates courier delays and physical document falsification.</a:t>
-            </a:r>
-          </a:p>
-          <a:p>
-            <a:pPr>
-              <a:spcBef>
-                <a:spcPts val="350"/>
-              </a:spcBef>
-            </a:pPr>
-            <a:r>
-              <a:rPr sz="950" b="1">
-                <a:solidFill>
-                  <a:srgbClr val="222222"/>
-                </a:solidFill>
-                <a:latin typeface="Arial"/>
-              </a:rPr>
-              <a:t>•  SIH Requirement 10 Compliance: </a:t>
-            </a:r>
-            <a:r>
-              <a:rPr sz="950" b="0">
-                <a:solidFill>
-                  <a:srgbClr val="222222"/>
-                </a:solidFill>
-                <a:latin typeface="Arial"/>
-              </a:rPr>
-              <a:t>Built-in Degree Certificate Generator displaying Student ID alongside Masked APAAR ID and Ed25519 QR.</a:t>
+              <a:t>100% paperless digital verification workflow eliminates courier delays and physical document falsification across thousands of colleges.</a:t>
+            </a:r>
+          </a:p>
+        </p:txBody>
+      </p:sp>
+      <p:sp>
+        <p:nvSpPr>
+          <p:cNvPr id="17413" name="Rounded Rectangle 17412"/>
+          <p:cNvSpPr/>
+          <p:nvPr/>
+        </p:nvSpPr>
+        <p:spPr>
+          <a:xfrm>
+            <a:off x="6858000" y="1115568"/>
+            <a:ext cx="4937760" cy="4983480"/>
+          </a:xfrm>
+          <a:prstGeom prst="roundRect">
+            <a:avLst/>
+          </a:prstGeom>
+          <a:solidFill>
+            <a:srgbClr val="FFFFFF"/>
+          </a:solidFill>
+          <a:ln w="19050">
+            <a:solidFill>
+              <a:srgbClr val="CBD5E1"/>
+            </a:solidFill>
+          </a:ln>
+        </p:spPr>
+        <p:style>
+          <a:lnRef idx="1">
+            <a:schemeClr val="accent1"/>
+          </a:lnRef>
+          <a:fillRef idx="3">
+            <a:schemeClr val="accent1"/>
+          </a:fillRef>
+          <a:effectRef idx="2">
+            <a:schemeClr val="accent1"/>
+          </a:effectRef>
+          <a:fontRef idx="minor">
+            <a:schemeClr val="lt1"/>
+          </a:fontRef>
+        </p:style>
+        <p:txBody>
+          <a:bodyPr rtlCol="0" anchor="ctr"/>
+          <a:lstStyle/>
+          <a:p>
+            <a:pPr algn="ctr"/>
+          </a:p>
+        </p:txBody>
+      </p:sp>
+      <p:sp>
+        <p:nvSpPr>
+          <p:cNvPr id="17414" name="Rounded Rectangle 17413"/>
+          <p:cNvSpPr/>
+          <p:nvPr/>
+        </p:nvSpPr>
+        <p:spPr>
+          <a:xfrm>
+            <a:off x="7040880" y="987552"/>
+            <a:ext cx="4572000" cy="347472"/>
+          </a:xfrm>
+          <a:prstGeom prst="roundRect">
+            <a:avLst/>
+          </a:prstGeom>
+          <a:solidFill>
+            <a:srgbClr val="1A365D"/>
+          </a:solidFill>
+          <a:ln>
+            <a:noFill/>
+          </a:ln>
+        </p:spPr>
+        <p:style>
+          <a:lnRef idx="1">
+            <a:schemeClr val="accent1"/>
+          </a:lnRef>
+          <a:fillRef idx="3">
+            <a:schemeClr val="accent1"/>
+          </a:fillRef>
+          <a:effectRef idx="2">
+            <a:schemeClr val="accent1"/>
+          </a:effectRef>
+          <a:fontRef idx="minor">
+            <a:schemeClr val="lt1"/>
+          </a:fontRef>
+        </p:style>
+        <p:txBody>
+          <a:bodyPr rtlCol="0" anchor="ctr" wrap="none" lIns="73152" rIns="73152"/>
+          <a:lstStyle/>
+          <a:p>
+            <a:pPr algn="ctr">
+              <a:defRPr sz="1000" b="1">
+                <a:solidFill>
+                  <a:srgbClr val="FFFFFF"/>
+                </a:solidFill>
+                <a:latin typeface="Arial"/>
+              </a:defRPr>
+            </a:pPr>
+            <a:r>
+              <a:t>SIH-R10 COMPLIANT CERTIFICATE ENGINE</a:t>
             </a:r>
           </a:p>
         </p:txBody>
       </p:sp>
       <p:pic>
         <p:nvPicPr>
-          <p:cNvPr id="17411" name="Picture 17410" descr="student_certificate_verified.png"/>
+          <p:cNvPr id="17415" name="Picture 17414" descr="student_certificate_verified.png"/>
           <p:cNvPicPr>
             <a:picLocks noChangeAspect="1"/>
           </p:cNvPicPr>
@@ -8820,8 +9955,8 @@
         </p:blipFill>
         <p:spPr>
           <a:xfrm>
-            <a:off x="6720840" y="1188720"/>
-            <a:ext cx="5074920" cy="3383280"/>
+            <a:off x="6995160" y="1389888"/>
+            <a:ext cx="4663440" cy="2926080"/>
           </a:xfrm>
           <a:prstGeom prst="rect">
             <a:avLst/>
@@ -8830,14 +9965,14 @@
       </p:pic>
       <p:sp>
         <p:nvSpPr>
-          <p:cNvPr id="17412" name="TextBox 17411"/>
+          <p:cNvPr id="17416" name="TextBox 17415"/>
           <p:cNvSpPr txBox="1"/>
           <p:nvPr/>
         </p:nvSpPr>
         <p:spPr>
           <a:xfrm>
-            <a:off x="6720840" y="4681728"/>
-            <a:ext cx="5074920" cy="1417320"/>
+            <a:off x="6995160" y="4407408"/>
+            <a:ext cx="4663440" cy="1554480"/>
           </a:xfrm>
           <a:prstGeom prst="rect">
             <a:avLst/>
@@ -8845,21 +9980,20 @@
           <a:noFill/>
         </p:spPr>
         <p:txBody>
-          <a:bodyPr wrap="square" lIns="45720" rIns="45720" tIns="18288" bIns="18288">
+          <a:bodyPr wrap="square" lIns="0" rIns="0">
             <a:spAutoFit/>
           </a:bodyPr>
           <a:lstStyle/>
           <a:p>
-            <a:pPr>
-              <a:defRPr sz="850" b="1">
+            <a:r>
+              <a:rPr sz="900" b="1">
                 <a:solidFill>
                   <a:srgbClr val="008C6E"/>
                 </a:solidFill>
                 <a:latin typeface="Arial"/>
-              </a:defRPr>
-            </a:pPr>
-            <a:r>
-              <a:t>PROTOTYPE EVIDENCE &amp; LIVE VERIFICATION</a:t>
+              </a:rPr>
+              <a:t>SIH Requirement 10 Explicitly Fulfilled:
+</a:t>
             </a:r>
           </a:p>
           <a:p>
@@ -8867,15 +10001,49 @@
               <a:spcBef>
                 <a:spcPts val="200"/>
               </a:spcBef>
-              <a:defRPr sz="850" i="1">
-                <a:solidFill>
-                  <a:srgbClr val="5A5A5A"/>
-                </a:solidFill>
-                <a:latin typeface="Arial"/>
-              </a:defRPr>
-            </a:pPr>
-            <a:r>
-              <a:t>SIH-R10 Compliant Degree Certificate Engine (/admissions/certificate/[id]) displaying Student Roll No, Masked APAAR ID, Council Seal, and Asymmetric Ed25519 QR Code for instant offline verification.</a:t>
+            </a:pPr>
+            <a:r>
+              <a:rPr sz="850" b="1">
+                <a:solidFill>
+                  <a:srgbClr val="112266"/>
+                </a:solidFill>
+                <a:latin typeface="Arial"/>
+              </a:rPr>
+              <a:t>• Dual-Display Credentials: </a:t>
+            </a:r>
+            <a:r>
+              <a:rPr sz="850">
+                <a:solidFill>
+                  <a:srgbClr val="222222"/>
+                </a:solidFill>
+                <a:latin typeface="Arial"/>
+              </a:rPr>
+              <a:t>Degree certificates display Student Roll No (DTU-2026-CSE-004) alongside Masked APAAR ID (XXXXXXXX5678).</a:t>
+            </a:r>
+          </a:p>
+          <a:p>
+            <a:pPr>
+              <a:spcBef>
+                <a:spcPts val="200"/>
+              </a:spcBef>
+            </a:pPr>
+            <a:r>
+              <a:rPr sz="850" b="1">
+                <a:solidFill>
+                  <a:srgbClr val="112266"/>
+                </a:solidFill>
+                <a:latin typeface="Arial"/>
+              </a:rPr>
+              <a:t>• Asymmetric Ed25519 QR Code: </a:t>
+            </a:r>
+            <a:r>
+              <a:rPr sz="850">
+                <a:solidFill>
+                  <a:srgbClr val="222222"/>
+                </a:solidFill>
+                <a:latin typeface="Arial"/>
+              </a:rPr>
+              <a:t>Embedded high-density QR code enables offline instant authenticity checks against AICTE public keys with zero raw PII exposure.</a:t>
             </a:r>
           </a:p>
         </p:txBody>
@@ -9001,8 +10169,8 @@
         </p:nvSpPr>
         <p:spPr>
           <a:xfrm>
-            <a:off x="1645920" y="164592"/>
-            <a:ext cx="8046720" cy="777240"/>
+            <a:off x="1691640" y="164592"/>
+            <a:ext cx="8092440" cy="777240"/>
           </a:xfrm>
         </p:spPr>
         <p:txBody>
@@ -9010,7 +10178,7 @@
           <a:lstStyle/>
           <a:p>
             <a:pPr eaLnBrk="1" hangingPunct="1" algn="l">
-              <a:defRPr sz="1700" b="1">
+              <a:defRPr sz="1650" b="1">
                 <a:solidFill>
                   <a:srgbClr val="112266"/>
                 </a:solidFill>
@@ -9266,14 +10434,112 @@
       </p:pic>
       <p:sp>
         <p:nvSpPr>
-          <p:cNvPr id="17410" name="TextBox 17409"/>
-          <p:cNvSpPr txBox="1"/>
+          <p:cNvPr id="17410" name="Rounded Rectangle 17409"/>
+          <p:cNvSpPr/>
           <p:nvPr/>
         </p:nvSpPr>
         <p:spPr>
           <a:xfrm>
             <a:off x="365760" y="1115568"/>
-            <a:ext cx="6217920" cy="5029200"/>
+            <a:ext cx="5303520" cy="4983480"/>
+          </a:xfrm>
+          <a:prstGeom prst="roundRect">
+            <a:avLst/>
+          </a:prstGeom>
+          <a:solidFill>
+            <a:srgbClr val="FFFFFF"/>
+          </a:solidFill>
+          <a:ln w="19050">
+            <a:solidFill>
+              <a:srgbClr val="CBD5E1"/>
+            </a:solidFill>
+          </a:ln>
+        </p:spPr>
+        <p:style>
+          <a:lnRef idx="1">
+            <a:schemeClr val="accent1"/>
+          </a:lnRef>
+          <a:fillRef idx="3">
+            <a:schemeClr val="accent1"/>
+          </a:fillRef>
+          <a:effectRef idx="2">
+            <a:schemeClr val="accent1"/>
+          </a:effectRef>
+          <a:fontRef idx="minor">
+            <a:schemeClr val="lt1"/>
+          </a:fontRef>
+        </p:style>
+        <p:txBody>
+          <a:bodyPr rtlCol="0" anchor="ctr"/>
+          <a:lstStyle/>
+          <a:p>
+            <a:pPr algn="ctr"/>
+          </a:p>
+        </p:txBody>
+      </p:sp>
+      <p:sp>
+        <p:nvSpPr>
+          <p:cNvPr id="17411" name="Rounded Rectangle 17410"/>
+          <p:cNvSpPr/>
+          <p:nvPr/>
+        </p:nvSpPr>
+        <p:spPr>
+          <a:xfrm>
+            <a:off x="548640" y="987552"/>
+            <a:ext cx="4937760" cy="347472"/>
+          </a:xfrm>
+          <a:prstGeom prst="roundRect">
+            <a:avLst/>
+          </a:prstGeom>
+          <a:solidFill>
+            <a:srgbClr val="112266"/>
+          </a:solidFill>
+          <a:ln>
+            <a:noFill/>
+          </a:ln>
+        </p:spPr>
+        <p:style>
+          <a:lnRef idx="1">
+            <a:schemeClr val="accent1"/>
+          </a:lnRef>
+          <a:fillRef idx="3">
+            <a:schemeClr val="accent1"/>
+          </a:fillRef>
+          <a:effectRef idx="2">
+            <a:schemeClr val="accent1"/>
+          </a:effectRef>
+          <a:fontRef idx="minor">
+            <a:schemeClr val="lt1"/>
+          </a:fontRef>
+        </p:style>
+        <p:txBody>
+          <a:bodyPr rtlCol="0" anchor="ctr" wrap="none" lIns="73152" rIns="73152"/>
+          <a:lstStyle/>
+          <a:p>
+            <a:pPr algn="ctr">
+              <a:defRPr sz="1000" b="1">
+                <a:solidFill>
+                  <a:srgbClr val="FFFFFF"/>
+                </a:solidFill>
+                <a:latin typeface="Arial"/>
+              </a:defRPr>
+            </a:pPr>
+            <a:r>
+              <a:t>FORMAL REGULATORY &amp; RESEARCH CITATIONS</a:t>
+            </a:r>
+          </a:p>
+        </p:txBody>
+      </p:sp>
+      <p:sp>
+        <p:nvSpPr>
+          <p:cNvPr id="17412" name="TextBox 17411"/>
+          <p:cNvSpPr txBox="1"/>
+          <p:nvPr/>
+        </p:nvSpPr>
+        <p:spPr>
+          <a:xfrm>
+            <a:off x="502920" y="1389888"/>
+            <a:ext cx="5029200" cy="4526280"/>
           </a:xfrm>
           <a:prstGeom prst="rect">
             <a:avLst/>
@@ -9281,325 +10547,250 @@
           <a:noFill/>
         </p:spPr>
         <p:txBody>
-          <a:bodyPr wrap="square" lIns="45720" rIns="45720">
+          <a:bodyPr wrap="square">
             <a:spAutoFit/>
           </a:bodyPr>
           <a:lstStyle/>
           <a:p>
             <a:pPr>
-              <a:defRPr sz="1100" b="1">
+              <a:spcBef>
+                <a:spcPts val="0"/>
+              </a:spcBef>
+            </a:pPr>
+            <a:r>
+              <a:rPr sz="950" b="1">
                 <a:solidFill>
                   <a:srgbClr val="008C6E"/>
                 </a:solidFill>
                 <a:latin typeface="Arial"/>
-              </a:defRPr>
-            </a:pPr>
-            <a:r>
-              <a:t>Formal Regulatory &amp; Cryptographic References</a:t>
+              </a:rPr>
+              <a:t>• AICTE Approval Process Handbook (APH 2026-27):
+</a:t>
+            </a:r>
+            <a:r>
+              <a:rPr sz="900">
+                <a:solidFill>
+                  <a:srgbClr val="222222"/>
+                </a:solidFill>
+                <a:latin typeface="Arial"/>
+              </a:rPr>
+              <a:t>   Norms for approved intake capacity, supernumerary seat reservation (TFW 5%, EWS 10%, KM), and NRI/OCI/FN category admission boundaries.</a:t>
             </a:r>
           </a:p>
           <a:p>
             <a:pPr>
               <a:spcBef>
-                <a:spcPts val="350"/>
+                <a:spcPts val="600"/>
               </a:spcBef>
             </a:pPr>
             <a:r>
               <a:rPr sz="950" b="1">
                 <a:solidFill>
+                  <a:srgbClr val="008C6E"/>
+                </a:solidFill>
+                <a:latin typeface="Arial"/>
+              </a:rPr>
+              <a:t>• National Education Policy (NEP 2020) &amp; NAD:
+</a:t>
+            </a:r>
+            <a:r>
+              <a:rPr sz="900">
+                <a:solidFill>
                   <a:srgbClr val="222222"/>
                 </a:solidFill>
                 <a:latin typeface="Arial"/>
               </a:rPr>
-              <a:t>•  AICTE APH 2026-27: </a:t>
-            </a:r>
-            <a:r>
-              <a:rPr sz="950" b="0">
-                <a:solidFill>
-                  <a:srgbClr val="222222"/>
-                </a:solidFill>
-                <a:latin typeface="Arial"/>
-              </a:rPr>
-              <a:t>Approval Process Handbook norms for sanctioned intake ceilings, supernumerary quotas, and NRI/OCI/FN rules.</a:t>
+              <a:t>   National Academic Depository (NAD) &amp; Academic Bank of Credits (ABC) frameworks establishing 12-digit APAAR as the lifelong national academic identity.</a:t>
             </a:r>
           </a:p>
           <a:p>
             <a:pPr>
               <a:spcBef>
-                <a:spcPts val="350"/>
+                <a:spcPts val="600"/>
               </a:spcBef>
             </a:pPr>
             <a:r>
               <a:rPr sz="950" b="1">
                 <a:solidFill>
+                  <a:srgbClr val="008C6E"/>
+                </a:solidFill>
+                <a:latin typeface="Arial"/>
+              </a:rPr>
+              <a:t>• IETF RFC 8032: Ed25519 Cryptography:
+</a:t>
+            </a:r>
+            <a:r>
+              <a:rPr sz="900">
+                <a:solidFill>
                   <a:srgbClr val="222222"/>
                 </a:solidFill>
                 <a:latin typeface="Arial"/>
               </a:rPr>
-              <a:t>•  NEP 2020 &amp; NAD: </a:t>
-            </a:r>
-            <a:r>
-              <a:rPr sz="950" b="0">
-                <a:solidFill>
-                  <a:srgbClr val="222222"/>
-                </a:solidFill>
-                <a:latin typeface="Arial"/>
-              </a:rPr>
-              <a:t>Framework for APAAR (Automated Permanent Academic Account Registry) and Academic Bank of Credits (ABC).</a:t>
+              <a:t>   Edwards-Curve Digital Signature Algorithm (Curve25519) providing sub-50ms asymmetric signature generation, collision resilience, and quantum tamper-resistance.</a:t>
             </a:r>
           </a:p>
           <a:p>
             <a:pPr>
               <a:spcBef>
-                <a:spcPts val="350"/>
+                <a:spcPts val="600"/>
               </a:spcBef>
             </a:pPr>
             <a:r>
               <a:rPr sz="950" b="1">
                 <a:solidFill>
+                  <a:srgbClr val="008C6E"/>
+                </a:solidFill>
+                <a:latin typeface="Arial"/>
+              </a:rPr>
+              <a:t>• Digital Personal Data Protection Act (DPDP Act 2023):
+</a:t>
+            </a:r>
+            <a:r>
+              <a:rPr sz="900">
+                <a:solidFill>
                   <a:srgbClr val="222222"/>
                 </a:solidFill>
                 <a:latin typeface="Arial"/>
               </a:rPr>
-              <a:t>•  IETF RFC 8032: </a:t>
-            </a:r>
-            <a:r>
-              <a:rPr sz="950" b="0">
-                <a:solidFill>
-                  <a:srgbClr val="222222"/>
-                </a:solidFill>
-                <a:latin typeface="Arial"/>
-              </a:rPr>
-              <a:t>Edwards-Curve Digital Signature Algorithm (Ed25519 / Curve25519) for tamper-proof academic credentials.</a:t>
+              <a:t>   Section 4 data fiduciary mandates, purpose limitation, identifier pseudonymization, and student consent management frameworks.</a:t>
             </a:r>
           </a:p>
           <a:p>
             <a:pPr>
               <a:spcBef>
-                <a:spcPts val="350"/>
+                <a:spcPts val="600"/>
               </a:spcBef>
             </a:pPr>
             <a:r>
               <a:rPr sz="950" b="1">
                 <a:solidFill>
+                  <a:srgbClr val="008C6E"/>
+                </a:solidFill>
+                <a:latin typeface="Arial"/>
+              </a:rPr>
+              <a:t>• NIST SP 800-107 &amp; Verhoeff Checksum Algorithm:
+</a:t>
+            </a:r>
+            <a:r>
+              <a:rPr sz="900">
+                <a:solidFill>
                   <a:srgbClr val="222222"/>
                 </a:solidFill>
                 <a:latin typeface="Arial"/>
               </a:rPr>
-              <a:t>•  DPDP Act 2023: </a:t>
-            </a:r>
-            <a:r>
-              <a:rPr sz="950" b="0">
-                <a:solidFill>
-                  <a:srgbClr val="222222"/>
-                </a:solidFill>
-                <a:latin typeface="Arial"/>
-              </a:rPr>
-              <a:t>Section 4 data fiduciary mandates, purpose limitation, identifier pseudonymization, and student consent mechanisms.</a:t>
-            </a:r>
-          </a:p>
-          <a:p>
-            <a:pPr>
-              <a:spcBef>
-                <a:spcPts val="350"/>
-              </a:spcBef>
-            </a:pPr>
-            <a:r>
-              <a:rPr sz="950" b="1">
-                <a:solidFill>
-                  <a:srgbClr val="222222"/>
-                </a:solidFill>
-                <a:latin typeface="Arial"/>
-              </a:rPr>
-              <a:t>•  NIST SP 800-107 &amp; Verhoeff: </a:t>
-            </a:r>
-            <a:r>
-              <a:rPr sz="950" b="0">
-                <a:solidFill>
-                  <a:srgbClr val="222222"/>
-                </a:solidFill>
-                <a:latin typeface="Arial"/>
-              </a:rPr>
-              <a:t>Permutation algorithms on Dihedral Group D5 for checksums and sequential SHA-256 cryptographic hash-chains.</a:t>
-            </a:r>
-          </a:p>
-          <a:p>
-            <a:pPr>
-              <a:spcBef>
-                <a:spcPts val="700"/>
-              </a:spcBef>
-              <a:defRPr sz="1100" b="1">
-                <a:solidFill>
-                  <a:srgbClr val="008C6E"/>
-                </a:solidFill>
-                <a:latin typeface="Arial"/>
-              </a:defRPr>
-            </a:pPr>
-            <a:r>
-              <a:t>Live Deployment, Source Code &amp; Verification Links</a:t>
-            </a:r>
-          </a:p>
-          <a:p>
-            <a:pPr>
-              <a:spcBef>
-                <a:spcPts val="350"/>
-              </a:spcBef>
-            </a:pPr>
-            <a:r>
-              <a:rPr sz="950" b="1">
-                <a:solidFill>
-                  <a:srgbClr val="222222"/>
-                </a:solidFill>
-                <a:latin typeface="Arial"/>
-              </a:rPr>
-              <a:t>•  Open-Source GitHub Repo: </a:t>
-            </a:r>
-            <a:r>
-              <a:rPr sz="950" b="0">
-                <a:solidFill>
-                  <a:srgbClr val="222222"/>
-                </a:solidFill>
-                <a:latin typeface="Arial"/>
-              </a:rPr>
-              <a:t>https://github.com/naveeshpcbin/APAAR-ID-BASED-SYSTEM</a:t>
-            </a:r>
-          </a:p>
-          <a:p>
-            <a:pPr>
-              <a:spcBef>
-                <a:spcPts val="350"/>
-              </a:spcBef>
-            </a:pPr>
-            <a:r>
-              <a:rPr sz="950" b="1">
-                <a:solidFill>
-                  <a:srgbClr val="222222"/>
-                </a:solidFill>
-                <a:latin typeface="Arial"/>
-              </a:rPr>
-              <a:t>•  Live Hosted Platform: </a:t>
-            </a:r>
-            <a:r>
-              <a:rPr sz="950" b="0">
-                <a:solidFill>
-                  <a:srgbClr val="222222"/>
-                </a:solidFill>
-                <a:latin typeface="Arial"/>
-              </a:rPr>
-              <a:t>https://pramaan-aicte.yourdomain.com  (Paste custom domain here)</a:t>
-            </a:r>
-          </a:p>
-          <a:p>
-            <a:pPr>
-              <a:spcBef>
-                <a:spcPts val="350"/>
-              </a:spcBef>
-            </a:pPr>
-            <a:r>
-              <a:rPr sz="950" b="1">
-                <a:solidFill>
-                  <a:srgbClr val="222222"/>
-                </a:solidFill>
-                <a:latin typeface="Arial"/>
-              </a:rPr>
-              <a:t>•  Interactive Swagger Docs: </a:t>
-            </a:r>
-            <a:r>
-              <a:rPr sz="950" b="0">
-                <a:solidFill>
-                  <a:srgbClr val="222222"/>
-                </a:solidFill>
-                <a:latin typeface="Arial"/>
-              </a:rPr>
-              <a:t>https://pramaan-backend.onrender.com/docs  (FastAPI OpenAPI 3.1)</a:t>
-            </a:r>
-          </a:p>
-          <a:p>
-            <a:pPr>
-              <a:spcBef>
-                <a:spcPts val="350"/>
-              </a:spcBef>
-            </a:pPr>
-            <a:r>
-              <a:rPr sz="950" b="1">
-                <a:solidFill>
-                  <a:srgbClr val="222222"/>
-                </a:solidFill>
-                <a:latin typeface="Arial"/>
-              </a:rPr>
-              <a:t>•  Supabase Cloud Database: </a:t>
-            </a:r>
-            <a:r>
-              <a:rPr sz="950" b="0">
-                <a:solidFill>
-                  <a:srgbClr val="222222"/>
-                </a:solidFill>
-                <a:latin typeface="Arial"/>
-              </a:rPr>
-              <a:t>Ref: xvuqedqfdeybryvbablt  (PostgreSQL Pooler aws-0-ap-south-1)</a:t>
-            </a:r>
-          </a:p>
-          <a:p>
-            <a:pPr>
-              <a:spcBef>
-                <a:spcPts val="350"/>
-              </a:spcBef>
-            </a:pPr>
-            <a:r>
-              <a:rPr sz="950" b="1">
-                <a:solidFill>
-                  <a:srgbClr val="222222"/>
-                </a:solidFill>
-                <a:latin typeface="Arial"/>
-              </a:rPr>
-              <a:t>•  Evaluator Quick Credentials: </a:t>
-            </a:r>
-            <a:r>
-              <a:rPr sz="950" b="0">
-                <a:solidFill>
-                  <a:srgbClr val="222222"/>
-                </a:solidFill>
-                <a:latin typeface="Arial"/>
-              </a:rPr>
-              <a:t>Central Admin: aicte.admin@pramaan.gov.in  |  Password: Admin@12345</a:t>
-            </a:r>
-          </a:p>
-        </p:txBody>
-      </p:sp>
-      <p:pic>
-        <p:nvPicPr>
-          <p:cNvPr id="17411" name="Picture 17410" descr="audit_ledger_verified.png"/>
-          <p:cNvPicPr>
-            <a:picLocks noChangeAspect="1"/>
-          </p:cNvPicPr>
+              <a:t>   Permutation algorithms on Dihedral Group D5 for transcription error suppression and sequential SHA-256 cryptographic hash chaining.</a:t>
+            </a:r>
+          </a:p>
+        </p:txBody>
+      </p:sp>
+      <p:sp>
+        <p:nvSpPr>
+          <p:cNvPr id="17413" name="Rounded Rectangle 17412"/>
+          <p:cNvSpPr/>
           <p:nvPr/>
-        </p:nvPicPr>
-        <p:blipFill>
-          <a:blip r:embed="rId4"/>
-          <a:stretch>
-            <a:fillRect/>
-          </a:stretch>
-        </p:blipFill>
+        </p:nvSpPr>
         <p:spPr>
           <a:xfrm>
-            <a:off x="6720840" y="1188720"/>
-            <a:ext cx="5074920" cy="3383280"/>
+            <a:off x="5943600" y="1115568"/>
+            <a:ext cx="5852160" cy="4983480"/>
           </a:xfrm>
-          <a:prstGeom prst="rect">
+          <a:prstGeom prst="roundRect">
             <a:avLst/>
           </a:prstGeom>
-        </p:spPr>
-      </p:pic>
-      <p:sp>
-        <p:nvSpPr>
-          <p:cNvPr id="17412" name="TextBox 17411"/>
+          <a:solidFill>
+            <a:srgbClr val="FFFFFF"/>
+          </a:solidFill>
+          <a:ln w="19050">
+            <a:solidFill>
+              <a:srgbClr val="008C6E"/>
+            </a:solidFill>
+          </a:ln>
+        </p:spPr>
+        <p:style>
+          <a:lnRef idx="1">
+            <a:schemeClr val="accent1"/>
+          </a:lnRef>
+          <a:fillRef idx="3">
+            <a:schemeClr val="accent1"/>
+          </a:fillRef>
+          <a:effectRef idx="2">
+            <a:schemeClr val="accent1"/>
+          </a:effectRef>
+          <a:fontRef idx="minor">
+            <a:schemeClr val="lt1"/>
+          </a:fontRef>
+        </p:style>
+        <p:txBody>
+          <a:bodyPr rtlCol="0" anchor="ctr"/>
+          <a:lstStyle/>
+          <a:p>
+            <a:pPr algn="ctr"/>
+          </a:p>
+        </p:txBody>
+      </p:sp>
+      <p:sp>
+        <p:nvSpPr>
+          <p:cNvPr id="17414" name="Rounded Rectangle 17413"/>
+          <p:cNvSpPr/>
+          <p:nvPr/>
+        </p:nvSpPr>
+        <p:spPr>
+          <a:xfrm>
+            <a:off x="6126480" y="987552"/>
+            <a:ext cx="5486400" cy="347472"/>
+          </a:xfrm>
+          <a:prstGeom prst="roundRect">
+            <a:avLst/>
+          </a:prstGeom>
+          <a:solidFill>
+            <a:srgbClr val="008C6E"/>
+          </a:solidFill>
+          <a:ln>
+            <a:noFill/>
+          </a:ln>
+        </p:spPr>
+        <p:style>
+          <a:lnRef idx="1">
+            <a:schemeClr val="accent1"/>
+          </a:lnRef>
+          <a:fillRef idx="3">
+            <a:schemeClr val="accent1"/>
+          </a:fillRef>
+          <a:effectRef idx="2">
+            <a:schemeClr val="accent1"/>
+          </a:effectRef>
+          <a:fontRef idx="minor">
+            <a:schemeClr val="lt1"/>
+          </a:fontRef>
+        </p:style>
+        <p:txBody>
+          <a:bodyPr rtlCol="0" anchor="ctr" wrap="none" lIns="73152" rIns="73152"/>
+          <a:lstStyle/>
+          <a:p>
+            <a:pPr algn="ctr">
+              <a:defRPr sz="1000" b="1">
+                <a:solidFill>
+                  <a:srgbClr val="FFFFFF"/>
+                </a:solidFill>
+                <a:latin typeface="Arial"/>
+              </a:defRPr>
+            </a:pPr>
+            <a:r>
+              <a:t>LIVE SYSTEM EVALUATION &amp; REPOSITORY PORTAL</a:t>
+            </a:r>
+          </a:p>
+        </p:txBody>
+      </p:sp>
+      <p:sp>
+        <p:nvSpPr>
+          <p:cNvPr id="17415" name="TextBox 17414"/>
           <p:cNvSpPr txBox="1"/>
           <p:nvPr/>
         </p:nvSpPr>
         <p:spPr>
           <a:xfrm>
-            <a:off x="6720840" y="4681728"/>
-            <a:ext cx="5074920" cy="1417320"/>
+            <a:off x="6080760" y="1389888"/>
+            <a:ext cx="5577840" cy="4526280"/>
           </a:xfrm>
           <a:prstGeom prst="rect">
             <a:avLst/>
@@ -9607,21 +10798,148 @@
           <a:noFill/>
         </p:spPr>
         <p:txBody>
-          <a:bodyPr wrap="square" lIns="45720" rIns="45720" tIns="18288" bIns="18288">
+          <a:bodyPr wrap="square">
             <a:spAutoFit/>
           </a:bodyPr>
           <a:lstStyle/>
           <a:p>
+            <a:r>
+              <a:rPr sz="1000" b="1">
+                <a:solidFill>
+                  <a:srgbClr val="112266"/>
+                </a:solidFill>
+                <a:latin typeface="Arial"/>
+              </a:rPr>
+              <a:t>🌐 LIVE HOSTED DEMO (CUSTOM DOMAIN):
+</a:t>
+            </a:r>
+            <a:r>
+              <a:rPr sz="1000" b="1">
+                <a:solidFill>
+                  <a:srgbClr val="1A56DB"/>
+                </a:solidFill>
+                <a:latin typeface="Arial"/>
+              </a:rPr>
+              <a:t>   https://pramaan-aicte.yourdomain.com   [PASTE YOUR CUSTOM DOMAIN HERE]
+</a:t>
+            </a:r>
+            <a:r>
+              <a:rPr sz="850" i="1">
+                <a:solidFill>
+                  <a:srgbClr val="64748B"/>
+                </a:solidFill>
+                <a:latin typeface="Arial"/>
+              </a:rPr>
+              <a:t>   (Evaluators: Access the full live production deployment hosted on Vercel Edge CDN)
+</a:t>
+            </a:r>
+          </a:p>
+          <a:p>
             <a:pPr>
-              <a:defRPr sz="850" b="1">
+              <a:spcBef>
+                <a:spcPts val="700"/>
+              </a:spcBef>
+            </a:pPr>
+            <a:r>
+              <a:rPr sz="1000" b="1">
+                <a:solidFill>
+                  <a:srgbClr val="112266"/>
+                </a:solidFill>
+                <a:latin typeface="Arial"/>
+              </a:rPr>
+              <a:t>📂 OPEN-SOURCE GITHUB REPOSITORY:
+</a:t>
+            </a:r>
+            <a:r>
+              <a:rPr sz="1000" b="1">
                 <a:solidFill>
                   <a:srgbClr val="008C6E"/>
                 </a:solidFill>
                 <a:latin typeface="Arial"/>
-              </a:defRPr>
-            </a:pPr>
-            <a:r>
-              <a:t>PROTOTYPE EVIDENCE &amp; LIVE VERIFICATION</a:t>
+              </a:rPr>
+              <a:t>   https://github.com/naveeshpcbin/APAAR-ID-BASED-SYSTEM
+</a:t>
+            </a:r>
+            <a:r>
+              <a:rPr sz="850" i="1">
+                <a:solidFill>
+                  <a:srgbClr val="64748B"/>
+                </a:solidFill>
+                <a:latin typeface="Arial"/>
+              </a:rPr>
+              <a:t>   (Complete source code, 147 committed files, production Dockerfiles, Supabase DDL)
+</a:t>
+            </a:r>
+          </a:p>
+          <a:p>
+            <a:pPr>
+              <a:spcBef>
+                <a:spcPts val="700"/>
+              </a:spcBef>
+            </a:pPr>
+            <a:r>
+              <a:rPr sz="1000" b="1">
+                <a:solidFill>
+                  <a:srgbClr val="112266"/>
+                </a:solidFill>
+                <a:latin typeface="Arial"/>
+              </a:rPr>
+              <a:t>⚡ INTERACTIVE API DOCUMENTATION (SWAGGER):
+</a:t>
+            </a:r>
+            <a:r>
+              <a:rPr sz="950" b="1">
+                <a:solidFill>
+                  <a:srgbClr val="222222"/>
+                </a:solidFill>
+                <a:latin typeface="Arial"/>
+              </a:rPr>
+              <a:t>   https://pramaan-backend.onrender.com/docs   (FastAPI OpenAPI 3.1 REST Contracts)
+</a:t>
+            </a:r>
+          </a:p>
+          <a:p>
+            <a:pPr>
+              <a:spcBef>
+                <a:spcPts val="700"/>
+              </a:spcBef>
+            </a:pPr>
+            <a:r>
+              <a:rPr sz="1000" b="1">
+                <a:solidFill>
+                  <a:srgbClr val="112266"/>
+                </a:solidFill>
+                <a:latin typeface="Arial"/>
+              </a:rPr>
+              <a:t>🗄️ SUPABASE CLOUD DATABASE:
+</a:t>
+            </a:r>
+            <a:r>
+              <a:rPr sz="950" b="1">
+                <a:solidFill>
+                  <a:srgbClr val="222222"/>
+                </a:solidFill>
+                <a:latin typeface="Arial"/>
+              </a:rPr>
+              <a:t>   Project Ref: xvuqedqfdeybryvbablt  |  Region: aws-0-ap-south-1 (Mumbai)
+</a:t>
+            </a:r>
+          </a:p>
+          <a:p>
+            <a:pPr>
+              <a:spcBef>
+                <a:spcPts val="700"/>
+              </a:spcBef>
+            </a:pPr>
+            <a:r>
+              <a:rPr sz="1000" b="1">
+                <a:solidFill>
+                  <a:srgbClr val="112266"/>
+                </a:solidFill>
+                <a:latin typeface="Arial"/>
+              </a:rPr>
+              <a:t>🔑 QUICK EVALUATOR DEMO CREDENTIALS:
+</a:t>
             </a:r>
           </a:p>
           <a:p>
@@ -9629,15 +10947,47 @@
               <a:spcBef>
                 <a:spcPts val="200"/>
               </a:spcBef>
-              <a:defRPr sz="850" i="1">
-                <a:solidFill>
-                  <a:srgbClr val="5A5A5A"/>
-                </a:solidFill>
-                <a:latin typeface="Arial"/>
-              </a:defRPr>
-            </a:pPr>
-            <a:r>
-              <a:t>Tamper-Evident SHA-256 Cryptographic Audit Ledger (/audit) verifying unbroken hash-chain continuity from Genesis Block 0 across all admissions, batch commits, and review decisions.</a:t>
+            </a:pPr>
+            <a:r>
+              <a:rPr sz="900">
+                <a:solidFill>
+                  <a:srgbClr val="222222"/>
+                </a:solidFill>
+                <a:latin typeface="Arial"/>
+              </a:rPr>
+              <a:t>   • AICTE Central Admin: aicte.admin@pramaan.gov.in  |  Password: Admin@12345</a:t>
+            </a:r>
+          </a:p>
+          <a:p>
+            <a:pPr>
+              <a:spcBef>
+                <a:spcPts val="200"/>
+              </a:spcBef>
+            </a:pPr>
+            <a:r>
+              <a:rPr sz="900">
+                <a:solidFill>
+                  <a:srgbClr val="222222"/>
+                </a:solidFill>
+                <a:latin typeface="Arial"/>
+              </a:rPr>
+              <a:t>   • DTU Delhi (Nodal): nodal.dtu@dtu.ac.in  |  Password: College@12345</a:t>
+            </a:r>
+          </a:p>
+          <a:p>
+            <a:pPr>
+              <a:spcBef>
+                <a:spcPts val="200"/>
+              </a:spcBef>
+            </a:pPr>
+            <a:r>
+              <a:rPr sz="900">
+                <a:solidFill>
+                  <a:srgbClr val="222222"/>
+                </a:solidFill>
+                <a:latin typeface="Arial"/>
+              </a:rPr>
+              <a:t>   • Corporate Verifier: verifier.corp@tcs.com  |  Password: Verify@12345</a:t>
             </a:r>
           </a:p>
         </p:txBody>

--- a/finaldemoppt/PRAMAAN-AICTE_SIH2026_Idea_Presentation.pptx
+++ b/finaldemoppt/PRAMAAN-AICTE_SIH2026_Idea_Presentation.pptx
@@ -6986,7 +6986,7 @@
       </p:sp>
       <p:pic>
         <p:nvPicPr>
-          <p:cNvPr id="15373" name="Picture 15372" descr="dashboard_overview.png"/>
+          <p:cNvPr id="15373" name="Picture 15372" descr="02_dashboard_overview.png"/>
           <p:cNvPicPr>
             <a:picLocks noChangeAspect="1"/>
           </p:cNvPicPr>
@@ -8874,8 +8874,8 @@
         </p:nvSpPr>
         <p:spPr>
           <a:xfrm>
-            <a:off x="6080760" y="1389888"/>
-            <a:ext cx="5577840" cy="4526280"/>
+            <a:off x="6080760" y="1353312"/>
+            <a:ext cx="5577840" cy="2926080"/>
           </a:xfrm>
           <a:prstGeom prst="rect">
             <a:avLst/>
@@ -8883,7 +8883,7 @@
           <a:noFill/>
         </p:spPr>
         <p:txBody>
-          <a:bodyPr wrap="square">
+          <a:bodyPr wrap="square" lIns="0" rIns="0" tIns="0" bIns="0">
             <a:spAutoFit/>
           </a:bodyPr>
           <a:lstStyle/>
@@ -8894,7 +8894,7 @@
               </a:spcBef>
             </a:pPr>
             <a:r>
-              <a:rPr sz="900" b="1">
+              <a:rPr sz="819" b="1">
                 <a:solidFill>
                   <a:srgbClr val="BE2828"/>
                 </a:solidFill>
@@ -8903,23 +8903,23 @@
               <a:t>⚠️ 1. Data Heterogeneity: </a:t>
             </a:r>
             <a:r>
-              <a:rPr sz="900">
+              <a:rPr sz="800">
                 <a:solidFill>
                   <a:srgbClr val="222222"/>
                 </a:solidFill>
                 <a:latin typeface="Arial"/>
               </a:rPr>
-              <a:t>Inconsistent college ERP schemas, date formats (DD/MM/YYYY vs YYYY-MM-DD), and branch codes across 10,000+ colleges.</a:t>
+              <a:t>Inconsistent college ERP schemas, date formats, and branch codes across 10,000+ colleges.</a:t>
             </a:r>
           </a:p>
           <a:p>
             <a:pPr>
               <a:spcBef>
-                <a:spcPts val="150"/>
+                <a:spcPts val="100"/>
               </a:spcBef>
             </a:pPr>
             <a:r>
-              <a:rPr sz="900" b="1">
+              <a:rPr sz="819" b="1">
                 <a:solidFill>
                   <a:srgbClr val="008C6E"/>
                 </a:solidFill>
@@ -8928,23 +8928,23 @@
               <a:t>   → Solution: </a:t>
             </a:r>
             <a:r>
-              <a:rPr sz="900">
+              <a:rPr sz="800">
                 <a:solidFill>
                   <a:srgbClr val="222222"/>
                 </a:solidFill>
                 <a:latin typeface="Arial"/>
               </a:rPr>
-              <a:t>Resilient fuzzy normalizer with automatic alias dictionary and multi-format date parser standardizes disparate imports automatically.</a:t>
+              <a:t>Resilient fuzzy normalizer standardizes 50+ divergent column headers automatically.</a:t>
             </a:r>
           </a:p>
           <a:p>
             <a:pPr>
               <a:spcBef>
-                <a:spcPts val="500"/>
+                <a:spcPts val="300"/>
               </a:spcBef>
             </a:pPr>
             <a:r>
-              <a:rPr sz="900" b="1">
+              <a:rPr sz="819" b="1">
                 <a:solidFill>
                   <a:srgbClr val="BE2828"/>
                 </a:solidFill>
@@ -8953,23 +8953,23 @@
               <a:t>⚠️ 2. Student Privacy Risks: </a:t>
             </a:r>
             <a:r>
-              <a:rPr sz="900">
+              <a:rPr sz="800">
                 <a:solidFill>
                   <a:srgbClr val="222222"/>
                 </a:solidFill>
                 <a:latin typeface="Arial"/>
               </a:rPr>
-              <a:t>Exposure or logging of plaintext 12-digit student APAAR identifiers breaches Digital Personal Data Protection (DPDP) Act 2023.</a:t>
+              <a:t>Exposure of plaintext 12-digit student APAAR identifiers breaches DPDP Act 2023.</a:t>
             </a:r>
           </a:p>
           <a:p>
             <a:pPr>
               <a:spcBef>
-                <a:spcPts val="150"/>
+                <a:spcPts val="100"/>
               </a:spcBef>
             </a:pPr>
             <a:r>
-              <a:rPr sz="900" b="1">
+              <a:rPr sz="819" b="1">
                 <a:solidFill>
                   <a:srgbClr val="008C6E"/>
                 </a:solidFill>
@@ -8978,23 +8978,23 @@
               <a:t>   → Solution: </a:t>
             </a:r>
             <a:r>
-              <a:rPr sz="900">
+              <a:rPr sz="800">
                 <a:solidFill>
                   <a:srgbClr val="222222"/>
                 </a:solidFill>
                 <a:latin typeface="Arial"/>
               </a:rPr>
-              <a:t>Privacy-by-design Keyed HMAC-SHA256 indexing + dynamic masking (XXXX-XXXX-9012) ensures zero searchable plaintext exposure in cloud databases.</a:t>
+              <a:t>Privacy-by-design Keyed HMAC-SHA256 indexing + dynamic masking (XXXX-XXXX-9012) ensures zero raw PII in DB.</a:t>
             </a:r>
           </a:p>
           <a:p>
             <a:pPr>
               <a:spcBef>
-                <a:spcPts val="500"/>
+                <a:spcPts val="300"/>
               </a:spcBef>
             </a:pPr>
             <a:r>
-              <a:rPr sz="900" b="1">
+              <a:rPr sz="819" b="1">
                 <a:solidFill>
                   <a:srgbClr val="BE2828"/>
                 </a:solidFill>
@@ -9003,23 +9003,23 @@
               <a:t>⚠️ 3. Cross-College Collisions: </a:t>
             </a:r>
             <a:r>
-              <a:rPr sz="900">
+              <a:rPr sz="800">
                 <a:solidFill>
                   <a:srgbClr val="222222"/>
                 </a:solidFill>
                 <a:latin typeface="Arial"/>
               </a:rPr>
-              <a:t>Concurrent active technical admissions across different universities create jurisdictional deadlocks and seat hoarding.</a:t>
+              <a:t>Concurrent technical admissions across universities create deadlocks and seat hoarding.</a:t>
             </a:r>
           </a:p>
           <a:p>
             <a:pPr>
               <a:spcBef>
-                <a:spcPts val="150"/>
+                <a:spcPts val="100"/>
               </a:spcBef>
             </a:pPr>
             <a:r>
-              <a:rPr sz="900" b="1">
+              <a:rPr sz="819" b="1">
                 <a:solidFill>
                   <a:srgbClr val="008C6E"/>
                 </a:solidFill>
@@ -9028,23 +9028,23 @@
               <a:t>   → Solution: </a:t>
             </a:r>
             <a:r>
-              <a:rPr sz="900">
+              <a:rPr sz="800">
                 <a:solidFill>
                   <a:srgbClr val="222222"/>
                 </a:solidFill>
                 <a:latin typeface="Arial"/>
               </a:rPr>
-              <a:t>Real-time duplicate collision radar with side-by-side claim timestamps, fee proofs, and 1-click administrative adjudication.</a:t>
+              <a:t>Real-time duplicate collision radar with side-by-side claim timestamps and 1-click administrative adjudication.</a:t>
             </a:r>
           </a:p>
           <a:p>
             <a:pPr>
               <a:spcBef>
-                <a:spcPts val="500"/>
+                <a:spcPts val="300"/>
               </a:spcBef>
             </a:pPr>
             <a:r>
-              <a:rPr sz="900" b="1">
+              <a:rPr sz="819" b="1">
                 <a:solidFill>
                   <a:srgbClr val="BE2828"/>
                 </a:solidFill>
@@ -9053,7 +9053,7 @@
               <a:t>⚠️ 4. Record Tampering Risks: </a:t>
             </a:r>
             <a:r>
-              <a:rPr sz="900">
+              <a:rPr sz="800">
                 <a:solidFill>
                   <a:srgbClr val="222222"/>
                 </a:solidFill>
@@ -9065,11 +9065,11 @@
           <a:p>
             <a:pPr>
               <a:spcBef>
-                <a:spcPts val="150"/>
+                <a:spcPts val="100"/>
               </a:spcBef>
             </a:pPr>
             <a:r>
-              <a:rPr sz="900" b="1">
+              <a:rPr sz="819" b="1">
                 <a:solidFill>
                   <a:srgbClr val="008C6E"/>
                 </a:solidFill>
@@ -9078,89 +9078,41 @@
               <a:t>   → Solution: </a:t>
             </a:r>
             <a:r>
-              <a:rPr sz="900">
+              <a:rPr sz="800">
                 <a:solidFill>
                   <a:srgbClr val="222222"/>
                 </a:solidFill>
                 <a:latin typeface="Arial"/>
               </a:rPr>
-              <a:t>Append-only sequential SHA-256 hash chaining (Hash_n = SHA256(... || Hash_n-1)) mathematically exposes any historical database manipulation.</a:t>
-            </a:r>
-          </a:p>
-        </p:txBody>
-      </p:sp>
-      <p:sp>
-        <p:nvSpPr>
-          <p:cNvPr id="17416" name="Rounded Rectangle 17415"/>
-          <p:cNvSpPr/>
+              <a:t>Append-only sequential SHA-256 hash chaining (Hash_n = SHA256(Record_n || Hash_n-1)) mathematically exposes any tampering.</a:t>
+            </a:r>
+          </a:p>
+        </p:txBody>
+      </p:sp>
+      <p:pic>
+        <p:nvPicPr>
+          <p:cNvPr id="17416" name="Picture 17415" descr="03_conflicts_adjudicated.png"/>
+          <p:cNvPicPr>
+            <a:picLocks noChangeAspect="1"/>
+          </p:cNvPicPr>
           <p:nvPr/>
-        </p:nvSpPr>
+        </p:nvPicPr>
+        <p:blipFill>
+          <a:blip r:embed="rId4"/>
+          <a:stretch>
+            <a:fillRect/>
+          </a:stretch>
+        </p:blipFill>
         <p:spPr>
           <a:xfrm>
-            <a:off x="6080760" y="4892040"/>
-            <a:ext cx="5577840" cy="1051560"/>
+            <a:off x="6080760" y="4370832"/>
+            <a:ext cx="5577840" cy="1645920"/>
           </a:xfrm>
-          <a:prstGeom prst="roundRect">
+          <a:prstGeom prst="rect">
             <a:avLst/>
           </a:prstGeom>
-          <a:solidFill>
-            <a:srgbClr val="F8FAFC"/>
-          </a:solidFill>
-          <a:ln w="15240">
-            <a:solidFill>
-              <a:srgbClr val="008C6E"/>
-            </a:solidFill>
-          </a:ln>
-        </p:spPr>
-        <p:style>
-          <a:lnRef idx="1">
-            <a:schemeClr val="accent1"/>
-          </a:lnRef>
-          <a:fillRef idx="3">
-            <a:schemeClr val="accent1"/>
-          </a:fillRef>
-          <a:effectRef idx="2">
-            <a:schemeClr val="accent1"/>
-          </a:effectRef>
-          <a:fontRef idx="minor">
-            <a:schemeClr val="lt1"/>
-          </a:fontRef>
-        </p:style>
-        <p:txBody>
-          <a:bodyPr rtlCol="0" anchor="ctr" lIns="73152" rIns="73152" tIns="36576" bIns="36576"/>
-          <a:lstStyle/>
-          <a:p>
-            <a:pPr algn="ctr"/>
-            <a:r>
-              <a:rPr sz="850" b="1">
-                <a:solidFill>
-                  <a:srgbClr val="008C6E"/>
-                </a:solidFill>
-                <a:latin typeface="Arial"/>
-              </a:rPr>
-              <a:t>🛡️ VERIFIED IN IMPLEMENTED PRODUCTION PLATFORM:
-</a:t>
-            </a:r>
-          </a:p>
-          <a:p>
-            <a:pPr>
-              <a:spcBef>
-                <a:spcPts val="200"/>
-              </a:spcBef>
-            </a:pPr>
-            <a:r>
-              <a:rPr sz="800">
-                <a:solidFill>
-                  <a:srgbClr val="222222"/>
-                </a:solidFill>
-                <a:latin typeface="Arial"/>
-              </a:rPr>
-              <a:t>• Case #CONF-2026-0042: Cross-institution conflict between COEP &amp; DTU resolved via 1-click hearing adjudication.
-• 39 sequential SHA-256 audit events verified with 100% unbroken cryptographic hash integrity.</a:t>
-            </a:r>
-          </a:p>
-        </p:txBody>
-      </p:sp>
+        </p:spPr>
+      </p:pic>
     </p:spTree>
     <p:extLst>
       <p:ext uri="{BB962C8B-B14F-4D97-AF65-F5344CB8AC3E}">
@@ -9941,7 +9893,7 @@
       </p:sp>
       <p:pic>
         <p:nvPicPr>
-          <p:cNvPr id="17415" name="Picture 17414" descr="student_certificate_verified.png"/>
+          <p:cNvPr id="17415" name="Picture 17414" descr="08_student_certificate_verified.png"/>
           <p:cNvPicPr>
             <a:picLocks noChangeAspect="1"/>
           </p:cNvPicPr>
@@ -10018,7 +9970,7 @@
                 </a:solidFill>
                 <a:latin typeface="Arial"/>
               </a:rPr>
-              <a:t>Degree certificates display Student Roll No (DTU-2026-CSE-004) alongside Masked APAAR ID (XXXXXXXX5678).</a:t>
+              <a:t>Degree certificates display Student Roll No (ENR-108410E1) alongside Masked APAAR ID (XXXXXXXX7890) with TFW quota.</a:t>
             </a:r>
           </a:p>
           <a:p>
